--- a/PermaneIA-Apresentacao.pptx
+++ b/PermaneIA-Apresentacao.pptx
@@ -2088,24 +2088,24 @@
         </p:nvSpPr>
         <p:spPr>
           <a:xfrm>
-            <a:off x="640080" y="5623560"/>
-            <a:ext cx="10972800" cy="365760"/>
-          </a:xfrm>
-          <a:prstGeom prst="rect">
-            <a:avLst/>
-          </a:prstGeom>
-          <a:noFill/>
-          <a:ln/>
-        </p:spPr>
-        <p:txBody>
-          <a:bodyPr wrap="square" rtlCol="0" anchor="ctr"/>
-          <a:lstStyle/>
-          <a:p>
-            <a:pPr indent="0" marL="0">
-              <a:buNone/>
-            </a:pPr>
-            <a:r>
-              <a:rPr lang="en-US" sz="1300" dirty="0">
+            <a:off x="640080" y="5486400"/>
+            <a:ext cx="10972800" cy="475488"/>
+          </a:xfrm>
+          <a:prstGeom prst="rect">
+            <a:avLst/>
+          </a:prstGeom>
+          <a:noFill/>
+          <a:ln/>
+        </p:spPr>
+        <p:txBody>
+          <a:bodyPr wrap="square" rtlCol="0" anchor="ctr"/>
+          <a:lstStyle/>
+          <a:p>
+            <a:pPr indent="0" marL="0">
+              <a:buNone/>
+            </a:pPr>
+            <a:r>
+              <a:rPr lang="en-US" sz="1150" dirty="0">
                 <a:solidFill>
                   <a:srgbClr val="9FADBE"/>
                 </a:solidFill>
@@ -2113,9 +2113,26 @@
                 <a:ea typeface="Verdana" pitchFamily="34" charset="-122"/>
                 <a:cs typeface="Verdana" pitchFamily="34" charset="-120"/>
               </a:rPr>
-              <a:t>Camila Pereira Raimundo · Fabrício Júnio Almeida Dias · Kauã Limão Nunes · Luan Padilha Miranda</a:t>
-            </a:r>
-            <a:endParaRPr lang="en-US" sz="1300" dirty="0"/>
+              <a:t>Camila Pereira Raimundo · Fabrício Júnio Almeida Dias · Ian Felipe Amaral Oliveira Silva</a:t>
+            </a:r>
+            <a:endParaRPr lang="en-US" sz="1150" dirty="0"/>
+          </a:p>
+          <a:p>
+            <a:pPr indent="0" marL="0">
+              <a:buNone/>
+            </a:pPr>
+            <a:r>
+              <a:rPr lang="en-US" sz="1150" dirty="0">
+                <a:solidFill>
+                  <a:srgbClr val="9FADBE"/>
+                </a:solidFill>
+                <a:latin typeface="Verdana" pitchFamily="34" charset="0"/>
+                <a:ea typeface="Verdana" pitchFamily="34" charset="-122"/>
+                <a:cs typeface="Verdana" pitchFamily="34" charset="-120"/>
+              </a:rPr>
+              <a:t>Kauã Limão Nunes · Luan Padilha Miranda · Lucas Massamiti Tsuji</a:t>
+            </a:r>
+            <a:endParaRPr lang="en-US" sz="1150" dirty="0"/>
           </a:p>
         </p:txBody>
       </p:sp>
@@ -3791,8 +3808,8 @@
         </p:nvSpPr>
         <p:spPr>
           <a:xfrm>
-            <a:off x="548640" y="6400800"/>
-            <a:ext cx="7315200" cy="274320"/>
+            <a:off x="548640" y="6510528"/>
+            <a:ext cx="7315200" cy="256032"/>
           </a:xfrm>
           <a:prstGeom prst="rect">
             <a:avLst/>
@@ -3830,8 +3847,8 @@
         </p:nvSpPr>
         <p:spPr>
           <a:xfrm>
-            <a:off x="11185855" y="6400800"/>
-            <a:ext cx="457200" cy="274320"/>
+            <a:off x="11185855" y="6510528"/>
+            <a:ext cx="457200" cy="256032"/>
           </a:xfrm>
           <a:prstGeom prst="rect">
             <a:avLst/>
@@ -4408,8 +4425,8 @@
         </p:nvSpPr>
         <p:spPr>
           <a:xfrm>
-            <a:off x="548640" y="6400800"/>
-            <a:ext cx="7315200" cy="274320"/>
+            <a:off x="548640" y="6510528"/>
+            <a:ext cx="7315200" cy="256032"/>
           </a:xfrm>
           <a:prstGeom prst="rect">
             <a:avLst/>
@@ -4447,8 +4464,8 @@
         </p:nvSpPr>
         <p:spPr>
           <a:xfrm>
-            <a:off x="11185855" y="6400800"/>
-            <a:ext cx="457200" cy="274320"/>
+            <a:off x="11185855" y="6510528"/>
+            <a:ext cx="457200" cy="256032"/>
           </a:xfrm>
           <a:prstGeom prst="rect">
             <a:avLst/>
@@ -5331,8 +5348,8 @@
         </p:nvSpPr>
         <p:spPr>
           <a:xfrm>
-            <a:off x="548640" y="6400800"/>
-            <a:ext cx="7315200" cy="274320"/>
+            <a:off x="548640" y="6510528"/>
+            <a:ext cx="7315200" cy="256032"/>
           </a:xfrm>
           <a:prstGeom prst="rect">
             <a:avLst/>
@@ -5370,8 +5387,8 @@
         </p:nvSpPr>
         <p:spPr>
           <a:xfrm>
-            <a:off x="11185855" y="6400800"/>
-            <a:ext cx="457200" cy="274320"/>
+            <a:off x="11185855" y="6510528"/>
+            <a:ext cx="457200" cy="256032"/>
           </a:xfrm>
           <a:prstGeom prst="rect">
             <a:avLst/>
@@ -5617,24 +5634,24 @@
         </p:nvSpPr>
         <p:spPr>
           <a:xfrm>
-            <a:off x="640080" y="5623560"/>
-            <a:ext cx="10972800" cy="365760"/>
-          </a:xfrm>
-          <a:prstGeom prst="rect">
-            <a:avLst/>
-          </a:prstGeom>
-          <a:noFill/>
-          <a:ln/>
-        </p:spPr>
-        <p:txBody>
-          <a:bodyPr wrap="square" rtlCol="0" anchor="ctr"/>
-          <a:lstStyle/>
-          <a:p>
-            <a:pPr indent="0" marL="0">
-              <a:buNone/>
-            </a:pPr>
-            <a:r>
-              <a:rPr lang="en-US" sz="1250" dirty="0">
+            <a:off x="640080" y="5486400"/>
+            <a:ext cx="10972800" cy="475488"/>
+          </a:xfrm>
+          <a:prstGeom prst="rect">
+            <a:avLst/>
+          </a:prstGeom>
+          <a:noFill/>
+          <a:ln/>
+        </p:spPr>
+        <p:txBody>
+          <a:bodyPr wrap="square" rtlCol="0" anchor="ctr"/>
+          <a:lstStyle/>
+          <a:p>
+            <a:pPr indent="0" marL="0">
+              <a:buNone/>
+            </a:pPr>
+            <a:r>
+              <a:rPr lang="en-US" sz="1150" dirty="0">
                 <a:solidFill>
                   <a:srgbClr val="9FADBE"/>
                 </a:solidFill>
@@ -5642,9 +5659,26 @@
                 <a:ea typeface="Verdana" pitchFamily="34" charset="-122"/>
                 <a:cs typeface="Verdana" pitchFamily="34" charset="-120"/>
               </a:rPr>
-              <a:t>Camila Pereira Raimundo · Fabrício Júnio Almeida Dias · Kauã Limão Nunes · Luan Padilha Miranda</a:t>
-            </a:r>
-            <a:endParaRPr lang="en-US" sz="1250" dirty="0"/>
+              <a:t>Camila Pereira Raimundo · Fabrício Júnio Almeida Dias · Ian Felipe Amaral Oliveira Silva</a:t>
+            </a:r>
+            <a:endParaRPr lang="en-US" sz="1150" dirty="0"/>
+          </a:p>
+          <a:p>
+            <a:pPr indent="0" marL="0">
+              <a:buNone/>
+            </a:pPr>
+            <a:r>
+              <a:rPr lang="en-US" sz="1150" dirty="0">
+                <a:solidFill>
+                  <a:srgbClr val="9FADBE"/>
+                </a:solidFill>
+                <a:latin typeface="Verdana" pitchFamily="34" charset="0"/>
+                <a:ea typeface="Verdana" pitchFamily="34" charset="-122"/>
+                <a:cs typeface="Verdana" pitchFamily="34" charset="-120"/>
+              </a:rPr>
+              <a:t>Kauã Limão Nunes · Luan Padilha Miranda · Lucas Massamiti Tsuji</a:t>
+            </a:r>
+            <a:endParaRPr lang="en-US" sz="1150" dirty="0"/>
           </a:p>
         </p:txBody>
       </p:sp>
@@ -6306,8 +6340,8 @@
         </p:nvSpPr>
         <p:spPr>
           <a:xfrm>
-            <a:off x="548640" y="6400800"/>
-            <a:ext cx="7315200" cy="274320"/>
+            <a:off x="548640" y="6510528"/>
+            <a:ext cx="7315200" cy="256032"/>
           </a:xfrm>
           <a:prstGeom prst="rect">
             <a:avLst/>
@@ -6345,8 +6379,8 @@
         </p:nvSpPr>
         <p:spPr>
           <a:xfrm>
-            <a:off x="11185855" y="6400800"/>
-            <a:ext cx="457200" cy="274320"/>
+            <a:off x="11185855" y="6510528"/>
+            <a:ext cx="457200" cy="256032"/>
           </a:xfrm>
           <a:prstGeom prst="rect">
             <a:avLst/>
@@ -6846,8 +6880,8 @@
         </p:nvSpPr>
         <p:spPr>
           <a:xfrm>
-            <a:off x="548640" y="6400800"/>
-            <a:ext cx="7315200" cy="274320"/>
+            <a:off x="548640" y="6510528"/>
+            <a:ext cx="7315200" cy="256032"/>
           </a:xfrm>
           <a:prstGeom prst="rect">
             <a:avLst/>
@@ -6885,8 +6919,8 @@
         </p:nvSpPr>
         <p:spPr>
           <a:xfrm>
-            <a:off x="11185855" y="6400800"/>
-            <a:ext cx="457200" cy="274320"/>
+            <a:off x="11185855" y="6510528"/>
+            <a:ext cx="457200" cy="256032"/>
           </a:xfrm>
           <a:prstGeom prst="rect">
             <a:avLst/>
@@ -8750,8 +8784,8 @@
         </p:nvSpPr>
         <p:spPr>
           <a:xfrm>
-            <a:off x="548640" y="6400800"/>
-            <a:ext cx="7315200" cy="274320"/>
+            <a:off x="548640" y="6510528"/>
+            <a:ext cx="7315200" cy="256032"/>
           </a:xfrm>
           <a:prstGeom prst="rect">
             <a:avLst/>
@@ -8789,8 +8823,8 @@
         </p:nvSpPr>
         <p:spPr>
           <a:xfrm>
-            <a:off x="11185855" y="6400800"/>
-            <a:ext cx="457200" cy="274320"/>
+            <a:off x="11185855" y="6510528"/>
+            <a:ext cx="457200" cy="256032"/>
           </a:xfrm>
           <a:prstGeom prst="rect">
             <a:avLst/>
@@ -8900,7 +8934,7 @@
         <p:spPr>
           <a:xfrm>
             <a:off x="640080" y="777240"/>
-            <a:ext cx="10972800" cy="822960"/>
+            <a:ext cx="10972800" cy="1005840"/>
           </a:xfrm>
           <a:prstGeom prst="rect">
             <a:avLst/>
@@ -9370,7 +9404,7 @@
         </p:nvSpPr>
         <p:spPr>
           <a:xfrm>
-            <a:off x="640080" y="6263640"/>
+            <a:off x="640080" y="6053328"/>
             <a:ext cx="10972800" cy="320040"/>
           </a:xfrm>
           <a:prstGeom prst="rect">
@@ -9409,8 +9443,8 @@
         </p:nvSpPr>
         <p:spPr>
           <a:xfrm>
-            <a:off x="548640" y="6400800"/>
-            <a:ext cx="7315200" cy="274320"/>
+            <a:off x="548640" y="6510528"/>
+            <a:ext cx="7315200" cy="256032"/>
           </a:xfrm>
           <a:prstGeom prst="rect">
             <a:avLst/>
@@ -9448,8 +9482,8 @@
         </p:nvSpPr>
         <p:spPr>
           <a:xfrm>
-            <a:off x="11185855" y="6400800"/>
-            <a:ext cx="457200" cy="274320"/>
+            <a:off x="11185855" y="6510528"/>
+            <a:ext cx="457200" cy="256032"/>
           </a:xfrm>
           <a:prstGeom prst="rect">
             <a:avLst/>
@@ -9559,7 +9593,7 @@
         <p:spPr>
           <a:xfrm>
             <a:off x="640080" y="777240"/>
-            <a:ext cx="10972800" cy="822960"/>
+            <a:ext cx="10972800" cy="1005840"/>
           </a:xfrm>
           <a:prstGeom prst="rect">
             <a:avLst/>
@@ -10119,8 +10153,8 @@
         </p:nvSpPr>
         <p:spPr>
           <a:xfrm>
-            <a:off x="548640" y="6400800"/>
-            <a:ext cx="7315200" cy="274320"/>
+            <a:off x="548640" y="6510528"/>
+            <a:ext cx="7315200" cy="256032"/>
           </a:xfrm>
           <a:prstGeom prst="rect">
             <a:avLst/>
@@ -10158,8 +10192,8 @@
         </p:nvSpPr>
         <p:spPr>
           <a:xfrm>
-            <a:off x="11185855" y="6400800"/>
-            <a:ext cx="457200" cy="274320"/>
+            <a:off x="11185855" y="6510528"/>
+            <a:ext cx="457200" cy="256032"/>
           </a:xfrm>
           <a:prstGeom prst="rect">
             <a:avLst/>
@@ -10748,7 +10782,7 @@
         </p:nvSpPr>
         <p:spPr>
           <a:xfrm>
-            <a:off x="640080" y="6263640"/>
+            <a:off x="640080" y="6035040"/>
             <a:ext cx="10972800" cy="320040"/>
           </a:xfrm>
           <a:prstGeom prst="rect">
@@ -10787,8 +10821,8 @@
         </p:nvSpPr>
         <p:spPr>
           <a:xfrm>
-            <a:off x="548640" y="6400800"/>
-            <a:ext cx="7315200" cy="274320"/>
+            <a:off x="548640" y="6510528"/>
+            <a:ext cx="7315200" cy="256032"/>
           </a:xfrm>
           <a:prstGeom prst="rect">
             <a:avLst/>
@@ -10826,8 +10860,8 @@
         </p:nvSpPr>
         <p:spPr>
           <a:xfrm>
-            <a:off x="11185855" y="6400800"/>
-            <a:ext cx="457200" cy="274320"/>
+            <a:off x="11185855" y="6510528"/>
+            <a:ext cx="457200" cy="256032"/>
           </a:xfrm>
           <a:prstGeom prst="rect">
             <a:avLst/>
@@ -11416,7 +11450,7 @@
         </p:nvSpPr>
         <p:spPr>
           <a:xfrm>
-            <a:off x="640080" y="6309360"/>
+            <a:off x="640080" y="6199632"/>
             <a:ext cx="10972800" cy="320040"/>
           </a:xfrm>
           <a:prstGeom prst="rect">
@@ -11455,8 +11489,8 @@
         </p:nvSpPr>
         <p:spPr>
           <a:xfrm>
-            <a:off x="548640" y="6400800"/>
-            <a:ext cx="7315200" cy="274320"/>
+            <a:off x="548640" y="6510528"/>
+            <a:ext cx="7315200" cy="256032"/>
           </a:xfrm>
           <a:prstGeom prst="rect">
             <a:avLst/>
@@ -11494,8 +11528,8 @@
         </p:nvSpPr>
         <p:spPr>
           <a:xfrm>
-            <a:off x="11185855" y="6400800"/>
-            <a:ext cx="457200" cy="274320"/>
+            <a:off x="11185855" y="6510528"/>
+            <a:ext cx="457200" cy="256032"/>
           </a:xfrm>
           <a:prstGeom prst="rect">
             <a:avLst/>
@@ -12200,8 +12234,8 @@
         </p:nvSpPr>
         <p:spPr>
           <a:xfrm>
-            <a:off x="548640" y="6400800"/>
-            <a:ext cx="7315200" cy="274320"/>
+            <a:off x="548640" y="6510528"/>
+            <a:ext cx="7315200" cy="256032"/>
           </a:xfrm>
           <a:prstGeom prst="rect">
             <a:avLst/>
@@ -12239,8 +12273,8 @@
         </p:nvSpPr>
         <p:spPr>
           <a:xfrm>
-            <a:off x="11185855" y="6400800"/>
-            <a:ext cx="457200" cy="274320"/>
+            <a:off x="11185855" y="6510528"/>
+            <a:ext cx="457200" cy="256032"/>
           </a:xfrm>
           <a:prstGeom prst="rect">
             <a:avLst/>

--- a/PermaneIA-Apresentacao.pptx
+++ b/PermaneIA-Apresentacao.pptx
@@ -18,9 +18,10 @@
     <p:sldId id="266" r:id="rId12"/>
     <p:sldId id="267" r:id="rId13"/>
     <p:sldId id="268" r:id="rId14"/>
+    <p:sldId id="269" r:id="rId15"/>
   </p:sldIdLst>
   <p:notesMasterIdLst>
-    <p:notesMasterId r:id="rId15"/>
+    <p:notesMasterId r:id="rId16"/>
   </p:notesMasterIdLst>
   <p:sldSz cx="12191695" cy="6858000"/>
   <p:notesSz cx="6858000" cy="12191695"/>
@@ -890,6 +891,94 @@
             <a:fld id="{F7021451-1387-4CA6-816F-3879F97B5CBC}" type="slidenum">
               <a:rPr lang="en-US"/>
               <a:t>13</a:t>
+            </a:fld>
+            <a:endParaRPr lang="en-US"/>
+          </a:p>
+        </p:txBody>
+      </p:sp>
+    </p:spTree>
+    <p:extLst>
+      <p:ext uri="{BB962C8B-B14F-4D97-AF65-F5344CB8AC3E}">
+        <p14:creationId xmlns:p14="http://schemas.microsoft.com/office/powerpoint/2010/main" val="1024086991"/>
+      </p:ext>
+    </p:extLst>
+  </p:cSld>
+  <p:clrMapOvr>
+    <a:masterClrMapping/>
+  </p:clrMapOvr>
+</p:notes>
+</file>
+
+<file path=ppt/notesSlides/notesSlide14.xml><?xml version="1.0" encoding="utf-8"?>
+<p:notes xmlns:a="http://schemas.openxmlformats.org/drawingml/2006/main" xmlns:r="http://schemas.openxmlformats.org/officeDocument/2006/relationships" xmlns:p="http://schemas.openxmlformats.org/presentationml/2006/main">
+  <p:cSld>
+    <p:spTree>
+      <p:nvGrpSpPr>
+        <p:cNvPr id="1" name=""/>
+        <p:cNvGrpSpPr/>
+        <p:nvPr/>
+      </p:nvGrpSpPr>
+      <p:grpSpPr>
+        <a:xfrm>
+          <a:off x="0" y="0"/>
+          <a:ext cx="0" cy="0"/>
+          <a:chOff x="0" y="0"/>
+          <a:chExt cx="0" cy="0"/>
+        </a:xfrm>
+      </p:grpSpPr>
+      <p:sp>
+        <p:nvSpPr>
+          <p:cNvPr id="2" name="Slide Image Placeholder 1"/>
+          <p:cNvSpPr>
+            <a:spLocks noGrp="1" noRot="1" noChangeAspect="1"/>
+          </p:cNvSpPr>
+          <p:nvPr>
+            <p:ph type="sldImg"/>
+          </p:nvPr>
+        </p:nvSpPr>
+        <p:spPr/>
+      </p:sp>
+      <p:sp>
+        <p:nvSpPr>
+          <p:cNvPr id="3" name="Notes Placeholder 2"/>
+          <p:cNvSpPr>
+            <a:spLocks noGrp="1"/>
+          </p:cNvSpPr>
+          <p:nvPr>
+            <p:ph type="body" idx="1"/>
+          </p:nvPr>
+        </p:nvSpPr>
+        <p:spPr/>
+        <p:txBody>
+          <a:bodyPr/>
+          <a:lstStyle/>
+          <a:p>
+            <a:r>
+              <a:rPr lang="en-US" dirty="0"/>
+              <a:t/>
+            </a:r>
+            <a:endParaRPr lang="en-US" dirty="0"/>
+          </a:p>
+        </p:txBody>
+      </p:sp>
+      <p:sp>
+        <p:nvSpPr>
+          <p:cNvPr id="4" name="Slide Number Placeholder 3"/>
+          <p:cNvSpPr>
+            <a:spLocks noGrp="1"/>
+          </p:cNvSpPr>
+          <p:nvPr>
+            <p:ph type="sldNum" sz="quarter" idx="10"/>
+          </p:nvPr>
+        </p:nvSpPr>
+        <p:spPr/>
+        <p:txBody>
+          <a:bodyPr/>
+          <a:lstStyle/>
+          <a:p>
+            <a:fld id="{F7021451-1387-4CA6-816F-3879F97B5CBC}" type="slidenum">
+              <a:rPr lang="en-US"/>
+              <a:t>14</a:t>
             </a:fld>
             <a:endParaRPr lang="en-US"/>
           </a:p>
@@ -3943,7 +4032,7 @@
                 <a:ea typeface="Verdana" pitchFamily="34" charset="-122"/>
                 <a:cs typeface="Verdana" pitchFamily="34" charset="-120"/>
               </a:rPr>
-              <a:t>ÉTICA</a:t>
+              <a:t>OBSERVABILIDADE</a:t>
             </a:r>
             <a:endParaRPr lang="en-US" sz="1100" dirty="0"/>
           </a:p>
@@ -3982,7 +4071,7 @@
                 <a:ea typeface="Verdana" pitchFamily="34" charset="-122"/>
                 <a:cs typeface="Verdana" pitchFamily="34" charset="-120"/>
               </a:rPr>
-              <a:t>Sobre o uso de IA neste trabalho</a:t>
+              <a:t>O que a instrumentação revelou sobre o custo</a:t>
             </a:r>
             <a:endParaRPr lang="en-US" sz="2800" dirty="0"/>
           </a:p>
@@ -3997,11 +4086,11 @@
         <p:spPr>
           <a:xfrm>
             <a:off x="640080" y="1828800"/>
-            <a:ext cx="5303520" cy="3200400"/>
+            <a:ext cx="10881360" cy="1371600"/>
           </a:xfrm>
           <a:prstGeom prst="roundRect">
             <a:avLst>
-              <a:gd name="adj" fmla="val 2286"/>
+              <a:gd name="adj" fmla="val 5333"/>
             </a:avLst>
           </a:prstGeom>
           <a:solidFill>
@@ -4023,24 +4112,63 @@
         </p:nvSpPr>
         <p:spPr>
           <a:xfrm>
-            <a:off x="914400" y="2057400"/>
-            <a:ext cx="4754880" cy="365760"/>
-          </a:xfrm>
-          <a:prstGeom prst="rect">
-            <a:avLst/>
-          </a:prstGeom>
-          <a:noFill/>
-          <a:ln/>
-        </p:spPr>
-        <p:txBody>
-          <a:bodyPr wrap="square" rtlCol="0" anchor="ctr"/>
-          <a:lstStyle/>
-          <a:p>
-            <a:pPr indent="0" marL="0">
-              <a:buNone/>
-            </a:pPr>
-            <a:r>
-              <a:rPr lang="en-US" sz="1600" b="1" dirty="0">
+            <a:off x="914400" y="1965960"/>
+            <a:ext cx="4206240" cy="320040"/>
+          </a:xfrm>
+          <a:prstGeom prst="rect">
+            <a:avLst/>
+          </a:prstGeom>
+          <a:noFill/>
+          <a:ln/>
+        </p:spPr>
+        <p:txBody>
+          <a:bodyPr wrap="square" rtlCol="0" anchor="ctr"/>
+          <a:lstStyle/>
+          <a:p>
+            <a:pPr indent="0" marL="0">
+              <a:buNone/>
+            </a:pPr>
+            <a:r>
+              <a:rPr lang="en-US" sz="1400" b="1" dirty="0">
+                <a:solidFill>
+                  <a:srgbClr val="FFFFFF"/>
+                </a:solidFill>
+                <a:latin typeface="Verdana" pitchFamily="34" charset="0"/>
+                <a:ea typeface="Verdana" pitchFamily="34" charset="-122"/>
+                <a:cs typeface="Verdana" pitchFamily="34" charset="-120"/>
+              </a:rPr>
+              <a:t>95,7% dos tokens são de entrada</a:t>
+            </a:r>
+            <a:endParaRPr lang="en-US" sz="1400" dirty="0"/>
+          </a:p>
+        </p:txBody>
+      </p:sp>
+      <p:sp>
+        <p:nvSpPr>
+          <p:cNvPr id="6" name="Text 4"/>
+          <p:cNvSpPr/>
+          <p:nvPr/>
+        </p:nvSpPr>
+        <p:spPr>
+          <a:xfrm>
+            <a:off x="914400" y="2359152"/>
+            <a:ext cx="4206240" cy="320040"/>
+          </a:xfrm>
+          <a:prstGeom prst="rect">
+            <a:avLst/>
+          </a:prstGeom>
+          <a:noFill/>
+          <a:ln/>
+        </p:spPr>
+        <p:txBody>
+          <a:bodyPr wrap="square" rtlCol="0" anchor="ctr"/>
+          <a:lstStyle/>
+          <a:p>
+            <a:pPr indent="0" marL="0">
+              <a:buNone/>
+            </a:pPr>
+            <a:r>
+              <a:rPr lang="en-US" sz="1200" b="1" dirty="0">
                 <a:solidFill>
                   <a:srgbClr val="45BD8A"/>
                 </a:solidFill>
@@ -4048,22 +4176,22 @@
                 <a:ea typeface="Verdana" pitchFamily="34" charset="-122"/>
                 <a:cs typeface="Verdana" pitchFamily="34" charset="-120"/>
               </a:rPr>
-              <a:t>Feito com apoio de IA</a:t>
-            </a:r>
-            <a:endParaRPr lang="en-US" sz="1600" dirty="0"/>
-          </a:p>
-        </p:txBody>
-      </p:sp>
-      <p:sp>
-        <p:nvSpPr>
-          <p:cNvPr id="6" name="Text 4"/>
-          <p:cNvSpPr/>
-          <p:nvPr/>
-        </p:nvSpPr>
-        <p:spPr>
-          <a:xfrm>
-            <a:off x="914400" y="2560320"/>
-            <a:ext cx="4754880" cy="2194560"/>
+              <a:t>razão de 22,4 para 1</a:t>
+            </a:r>
+            <a:endParaRPr lang="en-US" sz="1200" dirty="0"/>
+          </a:p>
+        </p:txBody>
+      </p:sp>
+      <p:sp>
+        <p:nvSpPr>
+          <p:cNvPr id="7" name="Text 5"/>
+          <p:cNvSpPr/>
+          <p:nvPr/>
+        </p:nvSpPr>
+        <p:spPr>
+          <a:xfrm>
+            <a:off x="5303520" y="1993392"/>
+            <a:ext cx="6035040" cy="1005840"/>
           </a:xfrm>
           <a:prstGeom prst="rect">
             <a:avLst/>
@@ -4077,12 +4205,12 @@
           <a:p>
             <a:pPr indent="0" marL="0">
               <a:lnSpc>
-                <a:spcPct val="120000"/>
+                <a:spcPct val="115000"/>
               </a:lnSpc>
               <a:buNone/>
             </a:pPr>
             <a:r>
-              <a:rPr lang="en-US" sz="1250" dirty="0">
+              <a:rPr lang="en-US" sz="1150" dirty="0">
                 <a:solidFill>
                   <a:srgbClr val="9FADBE"/>
                 </a:solidFill>
@@ -4090,84 +4218,26 @@
                 <a:ea typeface="Verdana" pitchFamily="34" charset="-122"/>
                 <a:cs typeface="Verdana" pitchFamily="34" charset="-120"/>
               </a:rPr>
-              <a:t>• Boa parte do código: rotas, validações, interface e testes de tabela</a:t>
-            </a:r>
-            <a:endParaRPr lang="en-US" sz="1250" dirty="0"/>
-          </a:p>
-          <a:p>
-            <a:pPr indent="0" marL="0">
-              <a:lnSpc>
-                <a:spcPct val="120000"/>
-              </a:lnSpc>
-              <a:buNone/>
-            </a:pPr>
-            <a:endParaRPr lang="en-US" sz="1250" dirty="0"/>
-          </a:p>
-          <a:p>
-            <a:pPr indent="0" marL="0">
-              <a:lnSpc>
-                <a:spcPct val="120000"/>
-              </a:lnSpc>
-              <a:buNone/>
-            </a:pPr>
-            <a:r>
-              <a:rPr lang="en-US" sz="1250" dirty="0">
-                <a:solidFill>
-                  <a:srgbClr val="9FADBE"/>
-                </a:solidFill>
-                <a:latin typeface="Verdana" pitchFamily="34" charset="0"/>
-                <a:ea typeface="Verdana" pitchFamily="34" charset="-122"/>
-                <a:cs typeface="Verdana" pitchFamily="34" charset="-120"/>
-              </a:rPr>
-              <a:t>• Estruturação da documentação</a:t>
-            </a:r>
-            <a:endParaRPr lang="en-US" sz="1250" dirty="0"/>
-          </a:p>
-          <a:p>
-            <a:pPr indent="0" marL="0">
-              <a:lnSpc>
-                <a:spcPct val="120000"/>
-              </a:lnSpc>
-              <a:buNone/>
-            </a:pPr>
-            <a:endParaRPr lang="en-US" sz="1250" dirty="0"/>
-          </a:p>
-          <a:p>
-            <a:pPr indent="0" marL="0">
-              <a:lnSpc>
-                <a:spcPct val="120000"/>
-              </a:lnSpc>
-              <a:buNone/>
-            </a:pPr>
-            <a:r>
-              <a:rPr lang="en-US" sz="1250" dirty="0">
-                <a:solidFill>
-                  <a:srgbClr val="9FADBE"/>
-                </a:solidFill>
-                <a:latin typeface="Verdana" pitchFamily="34" charset="0"/>
-                <a:ea typeface="Verdana" pitchFamily="34" charset="-122"/>
-                <a:cs typeface="Verdana" pitchFamily="34" charset="-120"/>
-              </a:rPr>
-              <a:t>• Revisão de ortografia e clareza</a:t>
-            </a:r>
-            <a:endParaRPr lang="en-US" sz="1250" dirty="0"/>
-          </a:p>
-        </p:txBody>
-      </p:sp>
-      <p:sp>
-        <p:nvSpPr>
-          <p:cNvPr id="7" name="Shape 5"/>
-          <p:cNvSpPr/>
-          <p:nvPr/>
-        </p:nvSpPr>
-        <p:spPr>
-          <a:xfrm>
-            <a:off x="6263640" y="1828800"/>
-            <a:ext cx="5303520" cy="3200400"/>
+              <a:t>Em 30 chamadas reais ao Gemini: 38.117 tokens de entrada contra 1.701 de saída. A alavanca de custo num RAG não é trocar por um modelo mais barato para gerar, é recuperar menos trecho.</a:t>
+            </a:r>
+            <a:endParaRPr lang="en-US" sz="1150" dirty="0"/>
+          </a:p>
+        </p:txBody>
+      </p:sp>
+      <p:sp>
+        <p:nvSpPr>
+          <p:cNvPr id="8" name="Shape 6"/>
+          <p:cNvSpPr/>
+          <p:nvPr/>
+        </p:nvSpPr>
+        <p:spPr>
+          <a:xfrm>
+            <a:off x="640080" y="3310128"/>
+            <a:ext cx="10881360" cy="1371600"/>
           </a:xfrm>
           <a:prstGeom prst="roundRect">
             <a:avLst>
-              <a:gd name="adj" fmla="val 2286"/>
+              <a:gd name="adj" fmla="val 5333"/>
             </a:avLst>
           </a:prstGeom>
           <a:solidFill>
@@ -4183,30 +4253,69 @@
       </p:sp>
       <p:sp>
         <p:nvSpPr>
-          <p:cNvPr id="8" name="Text 6"/>
-          <p:cNvSpPr/>
-          <p:nvPr/>
-        </p:nvSpPr>
-        <p:spPr>
-          <a:xfrm>
-            <a:off x="6537960" y="2057400"/>
-            <a:ext cx="4754880" cy="365760"/>
-          </a:xfrm>
-          <a:prstGeom prst="rect">
-            <a:avLst/>
-          </a:prstGeom>
-          <a:noFill/>
-          <a:ln/>
-        </p:spPr>
-        <p:txBody>
-          <a:bodyPr wrap="square" rtlCol="0" anchor="ctr"/>
-          <a:lstStyle/>
-          <a:p>
-            <a:pPr indent="0" marL="0">
-              <a:buNone/>
-            </a:pPr>
-            <a:r>
-              <a:rPr lang="en-US" sz="1600" b="1" dirty="0">
+          <p:cNvPr id="9" name="Text 7"/>
+          <p:cNvSpPr/>
+          <p:nvPr/>
+        </p:nvSpPr>
+        <p:spPr>
+          <a:xfrm>
+            <a:off x="914400" y="3447288"/>
+            <a:ext cx="4206240" cy="320040"/>
+          </a:xfrm>
+          <a:prstGeom prst="rect">
+            <a:avLst/>
+          </a:prstGeom>
+          <a:noFill/>
+          <a:ln/>
+        </p:spPr>
+        <p:txBody>
+          <a:bodyPr wrap="square" rtlCol="0" anchor="ctr"/>
+          <a:lstStyle/>
+          <a:p>
+            <a:pPr indent="0" marL="0">
+              <a:buNone/>
+            </a:pPr>
+            <a:r>
+              <a:rPr lang="en-US" sz="1400" b="1" dirty="0">
+                <a:solidFill>
+                  <a:srgbClr val="FFFFFF"/>
+                </a:solidFill>
+                <a:latin typeface="Verdana" pitchFamily="34" charset="0"/>
+                <a:ea typeface="Verdana" pitchFamily="34" charset="-122"/>
+                <a:cs typeface="Verdana" pitchFamily="34" charset="-120"/>
+              </a:rPr>
+              <a:t>p50 1,4 s · p95 20,5 s</a:t>
+            </a:r>
+            <a:endParaRPr lang="en-US" sz="1400" dirty="0"/>
+          </a:p>
+        </p:txBody>
+      </p:sp>
+      <p:sp>
+        <p:nvSpPr>
+          <p:cNvPr id="10" name="Text 8"/>
+          <p:cNvSpPr/>
+          <p:nvPr/>
+        </p:nvSpPr>
+        <p:spPr>
+          <a:xfrm>
+            <a:off x="914400" y="3840480"/>
+            <a:ext cx="4206240" cy="320040"/>
+          </a:xfrm>
+          <a:prstGeom prst="rect">
+            <a:avLst/>
+          </a:prstGeom>
+          <a:noFill/>
+          <a:ln/>
+        </p:spPr>
+        <p:txBody>
+          <a:bodyPr wrap="square" rtlCol="0" anchor="ctr"/>
+          <a:lstStyle/>
+          <a:p>
+            <a:pPr indent="0" marL="0">
+              <a:buNone/>
+            </a:pPr>
+            <a:r>
+              <a:rPr lang="en-US" sz="1200" b="1" dirty="0">
                 <a:solidFill>
                   <a:srgbClr val="45BD8A"/>
                 </a:solidFill>
@@ -4214,22 +4323,22 @@
                 <a:ea typeface="Verdana" pitchFamily="34" charset="-122"/>
                 <a:cs typeface="Verdana" pitchFamily="34" charset="-120"/>
               </a:rPr>
-              <a:t>Decisão do grupo</a:t>
-            </a:r>
-            <a:endParaRPr lang="en-US" sz="1600" dirty="0"/>
-          </a:p>
-        </p:txBody>
-      </p:sp>
-      <p:sp>
-        <p:nvSpPr>
-          <p:cNvPr id="9" name="Text 7"/>
-          <p:cNvSpPr/>
-          <p:nvPr/>
-        </p:nvSpPr>
-        <p:spPr>
-          <a:xfrm>
-            <a:off x="6537960" y="2560320"/>
-            <a:ext cx="4754880" cy="2286000"/>
+              <a:t>104 consultas, 41,3% de recusa</a:t>
+            </a:r>
+            <a:endParaRPr lang="en-US" sz="1200" dirty="0"/>
+          </a:p>
+        </p:txBody>
+      </p:sp>
+      <p:sp>
+        <p:nvSpPr>
+          <p:cNvPr id="11" name="Text 9"/>
+          <p:cNvSpPr/>
+          <p:nvPr/>
+        </p:nvSpPr>
+        <p:spPr>
+          <a:xfrm>
+            <a:off x="5303520" y="3474720"/>
+            <a:ext cx="6035040" cy="1005840"/>
           </a:xfrm>
           <a:prstGeom prst="rect">
             <a:avLst/>
@@ -4243,12 +4352,12 @@
           <a:p>
             <a:pPr indent="0" marL="0">
               <a:lnSpc>
-                <a:spcPct val="120000"/>
+                <a:spcPct val="115000"/>
               </a:lnSpc>
               <a:buNone/>
             </a:pPr>
             <a:r>
-              <a:rPr lang="en-US" sz="1250" dirty="0">
+              <a:rPr lang="en-US" sz="1150" dirty="0">
                 <a:solidFill>
                   <a:srgbClr val="9FADBE"/>
                 </a:solidFill>
@@ -4256,28 +4365,146 @@
                 <a:ea typeface="Verdana" pitchFamily="34" charset="-122"/>
                 <a:cs typeface="Verdana" pitchFamily="34" charset="-120"/>
               </a:rPr>
-              <a:t>• A arquitetura e os ADRs</a:t>
-            </a:r>
-            <a:endParaRPr lang="en-US" sz="1250" dirty="0"/>
-          </a:p>
+              <a:t>O p95 não é o modelo pensando: é partida a frio da função sem servidor somada ao banco acordando da suspensão. Só a média esconderia quem abre o assistente primeiro no dia.</a:t>
+            </a:r>
+            <a:endParaRPr lang="en-US" sz="1150" dirty="0"/>
+          </a:p>
+        </p:txBody>
+      </p:sp>
+      <p:sp>
+        <p:nvSpPr>
+          <p:cNvPr id="12" name="Shape 10"/>
+          <p:cNvSpPr/>
+          <p:nvPr/>
+        </p:nvSpPr>
+        <p:spPr>
+          <a:xfrm>
+            <a:off x="640080" y="4791456"/>
+            <a:ext cx="10881360" cy="1371600"/>
+          </a:xfrm>
+          <a:prstGeom prst="roundRect">
+            <a:avLst>
+              <a:gd name="adj" fmla="val 5333"/>
+            </a:avLst>
+          </a:prstGeom>
+          <a:solidFill>
+            <a:srgbClr val="141B26"/>
+          </a:solidFill>
+          <a:ln w="12700">
+            <a:solidFill>
+              <a:srgbClr val="2B3849"/>
+            </a:solidFill>
+            <a:prstDash val="solid"/>
+          </a:ln>
+        </p:spPr>
+      </p:sp>
+      <p:sp>
+        <p:nvSpPr>
+          <p:cNvPr id="13" name="Text 11"/>
+          <p:cNvSpPr/>
+          <p:nvPr/>
+        </p:nvSpPr>
+        <p:spPr>
+          <a:xfrm>
+            <a:off x="914400" y="4928616"/>
+            <a:ext cx="4206240" cy="320040"/>
+          </a:xfrm>
+          <a:prstGeom prst="rect">
+            <a:avLst/>
+          </a:prstGeom>
+          <a:noFill/>
+          <a:ln/>
+        </p:spPr>
+        <p:txBody>
+          <a:bodyPr wrap="square" rtlCol="0" anchor="ctr"/>
+          <a:lstStyle/>
+          <a:p>
+            <a:pPr indent="0" marL="0">
+              <a:buNone/>
+            </a:pPr>
+            <a:r>
+              <a:rPr lang="en-US" sz="1400" b="1" dirty="0">
+                <a:solidFill>
+                  <a:srgbClr val="FFFFFF"/>
+                </a:solidFill>
+                <a:latin typeface="Verdana" pitchFamily="34" charset="0"/>
+                <a:ea typeface="Verdana" pitchFamily="34" charset="-122"/>
+                <a:cs typeface="Verdana" pitchFamily="34" charset="-120"/>
+              </a:rPr>
+              <a:t>Telemetria falha calada</a:t>
+            </a:r>
+            <a:endParaRPr lang="en-US" sz="1400" dirty="0"/>
+          </a:p>
+        </p:txBody>
+      </p:sp>
+      <p:sp>
+        <p:nvSpPr>
+          <p:cNvPr id="14" name="Text 12"/>
+          <p:cNvSpPr/>
+          <p:nvPr/>
+        </p:nvSpPr>
+        <p:spPr>
+          <a:xfrm>
+            <a:off x="914400" y="5321808"/>
+            <a:ext cx="4206240" cy="320040"/>
+          </a:xfrm>
+          <a:prstGeom prst="rect">
+            <a:avLst/>
+          </a:prstGeom>
+          <a:noFill/>
+          <a:ln/>
+        </p:spPr>
+        <p:txBody>
+          <a:bodyPr wrap="square" rtlCol="0" anchor="ctr"/>
+          <a:lstStyle/>
+          <a:p>
+            <a:pPr indent="0" marL="0">
+              <a:buNone/>
+            </a:pPr>
+            <a:r>
+              <a:rPr lang="en-US" sz="1200" b="1" dirty="0">
+                <a:solidFill>
+                  <a:srgbClr val="45BD8A"/>
+                </a:solidFill>
+                <a:latin typeface="Verdana" pitchFamily="34" charset="0"/>
+                <a:ea typeface="Verdana" pitchFamily="34" charset="-122"/>
+                <a:cs typeface="Verdana" pitchFamily="34" charset="-120"/>
+              </a:rPr>
+              <a:t>3 defeitos, 2 em produção</a:t>
+            </a:r>
+            <a:endParaRPr lang="en-US" sz="1200" dirty="0"/>
+          </a:p>
+        </p:txBody>
+      </p:sp>
+      <p:sp>
+        <p:nvSpPr>
+          <p:cNvPr id="15" name="Text 13"/>
+          <p:cNvSpPr/>
+          <p:nvPr/>
+        </p:nvSpPr>
+        <p:spPr>
+          <a:xfrm>
+            <a:off x="5303520" y="4956048"/>
+            <a:ext cx="6035040" cy="1005840"/>
+          </a:xfrm>
+          <a:prstGeom prst="rect">
+            <a:avLst/>
+          </a:prstGeom>
+          <a:noFill/>
+          <a:ln/>
+        </p:spPr>
+        <p:txBody>
+          <a:bodyPr wrap="square" rtlCol="0" anchor="ctr"/>
+          <a:lstStyle/>
           <a:p>
             <a:pPr indent="0" marL="0">
               <a:lnSpc>
-                <a:spcPct val="120000"/>
+                <a:spcPct val="115000"/>
               </a:lnSpc>
               <a:buNone/>
             </a:pPr>
-            <a:endParaRPr lang="en-US" sz="1250" dirty="0"/>
-          </a:p>
-          <a:p>
-            <a:pPr indent="0" marL="0">
-              <a:lnSpc>
-                <a:spcPct val="120000"/>
-              </a:lnSpc>
-              <a:buNone/>
-            </a:pPr>
-            <a:r>
-              <a:rPr lang="en-US" sz="1250" dirty="0">
+            <a:r>
+              <a:rPr lang="en-US" sz="1150" dirty="0">
                 <a:solidFill>
                   <a:srgbClr val="9FADBE"/>
                 </a:solidFill>
@@ -4285,125 +4512,38 @@
                 <a:ea typeface="Verdana" pitchFamily="34" charset="-122"/>
                 <a:cs typeface="Verdana" pitchFamily="34" charset="-120"/>
               </a:rPr>
-              <a:t>• A calibração dos conjuntos e das 27 regras</a:t>
-            </a:r>
-            <a:endParaRPr lang="en-US" sz="1250" dirty="0"/>
-          </a:p>
-          <a:p>
-            <a:pPr indent="0" marL="0">
-              <a:lnSpc>
-                <a:spcPct val="120000"/>
-              </a:lnSpc>
-              <a:buNone/>
-            </a:pPr>
-            <a:endParaRPr lang="en-US" sz="1250" dirty="0"/>
-          </a:p>
-          <a:p>
-            <a:pPr indent="0" marL="0">
-              <a:lnSpc>
-                <a:spcPct val="120000"/>
-              </a:lnSpc>
-              <a:buNone/>
-            </a:pPr>
-            <a:r>
-              <a:rPr lang="en-US" sz="1250" dirty="0">
-                <a:solidFill>
-                  <a:srgbClr val="9FADBE"/>
-                </a:solidFill>
-                <a:latin typeface="Verdana" pitchFamily="34" charset="0"/>
-                <a:ea typeface="Verdana" pitchFamily="34" charset="-122"/>
-                <a:cs typeface="Verdana" pitchFamily="34" charset="-120"/>
-              </a:rPr>
-              <a:t>• Escrever o motor Mamdani do zero</a:t>
-            </a:r>
-            <a:endParaRPr lang="en-US" sz="1250" dirty="0"/>
-          </a:p>
-          <a:p>
-            <a:pPr indent="0" marL="0">
-              <a:lnSpc>
-                <a:spcPct val="120000"/>
-              </a:lnSpc>
-              <a:buNone/>
-            </a:pPr>
-            <a:endParaRPr lang="en-US" sz="1250" dirty="0"/>
-          </a:p>
-          <a:p>
-            <a:pPr indent="0" marL="0">
-              <a:lnSpc>
-                <a:spcPct val="120000"/>
-              </a:lnSpc>
-              <a:buNone/>
-            </a:pPr>
-            <a:r>
-              <a:rPr lang="en-US" sz="1250" dirty="0">
-                <a:solidFill>
-                  <a:srgbClr val="9FADBE"/>
-                </a:solidFill>
-                <a:latin typeface="Verdana" pitchFamily="34" charset="0"/>
-                <a:ea typeface="Verdana" pitchFamily="34" charset="-122"/>
-                <a:cs typeface="Verdana" pitchFamily="34" charset="-120"/>
-              </a:rPr>
-              <a:t>• Não mostrar o score ao aluno</a:t>
-            </a:r>
-            <a:endParaRPr lang="en-US" sz="1250" dirty="0"/>
-          </a:p>
-          <a:p>
-            <a:pPr indent="0" marL="0">
-              <a:lnSpc>
-                <a:spcPct val="120000"/>
-              </a:lnSpc>
-              <a:buNone/>
-            </a:pPr>
-            <a:endParaRPr lang="en-US" sz="1250" dirty="0"/>
-          </a:p>
-          <a:p>
-            <a:pPr indent="0" marL="0">
-              <a:lnSpc>
-                <a:spcPct val="120000"/>
-              </a:lnSpc>
-              <a:buNone/>
-            </a:pPr>
-            <a:r>
-              <a:rPr lang="en-US" sz="1250" dirty="0">
-                <a:solidFill>
-                  <a:srgbClr val="9FADBE"/>
-                </a:solidFill>
-                <a:latin typeface="Verdana" pitchFamily="34" charset="0"/>
-                <a:ea typeface="Verdana" pitchFamily="34" charset="-122"/>
-                <a:cs typeface="Verdana" pitchFamily="34" charset="-120"/>
-              </a:rPr>
-              <a:t>• O conjunto de avaliação e a leitura dos resultados</a:t>
-            </a:r>
-            <a:endParaRPr lang="en-US" sz="1250" dirty="0"/>
-          </a:p>
-        </p:txBody>
-      </p:sp>
-      <p:sp>
-        <p:nvSpPr>
-          <p:cNvPr id="10" name="Text 8"/>
-          <p:cNvSpPr/>
-          <p:nvPr/>
-        </p:nvSpPr>
-        <p:spPr>
-          <a:xfrm>
-            <a:off x="640080" y="5303520"/>
-            <a:ext cx="10881360" cy="640080"/>
-          </a:xfrm>
-          <a:prstGeom prst="rect">
-            <a:avLst/>
-          </a:prstGeom>
-          <a:noFill/>
-          <a:ln/>
-        </p:spPr>
-        <p:txBody>
-          <a:bodyPr wrap="square" rtlCol="0" anchor="ctr"/>
-          <a:lstStyle/>
-          <a:p>
-            <a:pPr indent="0" marL="0">
-              <a:buNone/>
-            </a:pPr>
-            <a:r>
-              <a:rPr lang="en-US" sz="1300" b="1" dirty="0">
+              <a:t>Uma chave gravada com marca de ordem de byte derrubou TODA requisição, inclusive a de saúde. Duas cópias da biblioteca de rastro deixaram o painel vazio sem erro nenhum.</a:t>
+            </a:r>
+            <a:endParaRPr lang="en-US" sz="1150" dirty="0"/>
+          </a:p>
+        </p:txBody>
+      </p:sp>
+      <p:sp>
+        <p:nvSpPr>
+          <p:cNvPr id="16" name="Text 14"/>
+          <p:cNvSpPr/>
+          <p:nvPr/>
+        </p:nvSpPr>
+        <p:spPr>
+          <a:xfrm>
+            <a:off x="640080" y="6035040"/>
+            <a:ext cx="10972800" cy="320040"/>
+          </a:xfrm>
+          <a:prstGeom prst="rect">
+            <a:avLst/>
+          </a:prstGeom>
+          <a:noFill/>
+          <a:ln/>
+        </p:spPr>
+        <p:txBody>
+          <a:bodyPr wrap="square" rtlCol="0" anchor="ctr"/>
+          <a:lstStyle/>
+          <a:p>
+            <a:pPr indent="0" marL="0">
+              <a:buNone/>
+            </a:pPr>
+            <a:r>
+              <a:rPr lang="en-US" sz="1200" b="1" dirty="0">
                 <a:solidFill>
                   <a:srgbClr val="E6EAEF"/>
                 </a:solidFill>
@@ -4411,15 +4551,15 @@
                 <a:ea typeface="Verdana" pitchFamily="34" charset="-122"/>
                 <a:cs typeface="Verdana" pitchFamily="34" charset="-120"/>
               </a:rPr>
-              <a:t>Todo número deste trabalho sai de um script executável do repositório. Nenhum foi estimado. Onde não medimos, dissemos que não medimos.</a:t>
-            </a:r>
-            <a:endParaRPr lang="en-US" sz="1300" dirty="0"/>
-          </a:p>
-        </p:txBody>
-      </p:sp>
-      <p:sp>
-        <p:nvSpPr>
-          <p:cNvPr id="11" name="Text 9"/>
+              <a:t>A única prova de que a telemetria funciona é ler o dado de volta.</a:t>
+            </a:r>
+            <a:endParaRPr lang="en-US" sz="1200" dirty="0"/>
+          </a:p>
+        </p:txBody>
+      </p:sp>
+      <p:sp>
+        <p:nvSpPr>
+          <p:cNvPr id="17" name="Text 15"/>
           <p:cNvSpPr/>
           <p:nvPr/>
         </p:nvSpPr>
@@ -4458,7 +4598,7 @@
       </p:sp>
       <p:sp>
         <p:nvSpPr>
-          <p:cNvPr id="12" name="Text 10"/>
+          <p:cNvPr id="18" name="Text 16"/>
           <p:cNvSpPr/>
           <p:nvPr/>
         </p:nvSpPr>
@@ -4560,7 +4700,7 @@
                 <a:ea typeface="Verdana" pitchFamily="34" charset="-122"/>
                 <a:cs typeface="Verdana" pitchFamily="34" charset="-120"/>
               </a:rPr>
-              <a:t>DEMONSTRAÇÃO</a:t>
+              <a:t>ÉTICA</a:t>
             </a:r>
             <a:endParaRPr lang="en-US" sz="1100" dirty="0"/>
           </a:p>
@@ -4599,7 +4739,7 @@
                 <a:ea typeface="Verdana" pitchFamily="34" charset="-122"/>
                 <a:cs typeface="Verdana" pitchFamily="34" charset="-120"/>
               </a:rPr>
-              <a:t>Ao vivo, em permaneia.vercel.app</a:t>
+              <a:t>Sobre o uso de IA neste trabalho</a:t>
             </a:r>
             <a:endParaRPr lang="en-US" sz="2800" dirty="0"/>
           </a:p>
@@ -4613,12 +4753,12 @@
         </p:nvSpPr>
         <p:spPr>
           <a:xfrm>
-            <a:off x="640080" y="1737360"/>
-            <a:ext cx="10881360" cy="822960"/>
+            <a:off x="640080" y="1828800"/>
+            <a:ext cx="5303520" cy="3200400"/>
           </a:xfrm>
           <a:prstGeom prst="roundRect">
             <a:avLst>
-              <a:gd name="adj" fmla="val 8889"/>
+              <a:gd name="adj" fmla="val 2286"/>
             </a:avLst>
           </a:prstGeom>
           <a:solidFill>
@@ -4640,24 +4780,24 @@
         </p:nvSpPr>
         <p:spPr>
           <a:xfrm>
-            <a:off x="914400" y="1874520"/>
-            <a:ext cx="457200" cy="548640"/>
-          </a:xfrm>
-          <a:prstGeom prst="rect">
-            <a:avLst/>
-          </a:prstGeom>
-          <a:noFill/>
-          <a:ln/>
-        </p:spPr>
-        <p:txBody>
-          <a:bodyPr wrap="square" rtlCol="0" anchor="ctr"/>
-          <a:lstStyle/>
-          <a:p>
-            <a:pPr indent="0" marL="0">
-              <a:buNone/>
-            </a:pPr>
-            <a:r>
-              <a:rPr lang="en-US" sz="2000" b="1" dirty="0">
+            <a:off x="914400" y="2057400"/>
+            <a:ext cx="4754880" cy="365760"/>
+          </a:xfrm>
+          <a:prstGeom prst="rect">
+            <a:avLst/>
+          </a:prstGeom>
+          <a:noFill/>
+          <a:ln/>
+        </p:spPr>
+        <p:txBody>
+          <a:bodyPr wrap="square" rtlCol="0" anchor="ctr"/>
+          <a:lstStyle/>
+          <a:p>
+            <a:pPr indent="0" marL="0">
+              <a:buNone/>
+            </a:pPr>
+            <a:r>
+              <a:rPr lang="en-US" sz="1600" b="1" dirty="0">
                 <a:solidFill>
                   <a:srgbClr val="45BD8A"/>
                 </a:solidFill>
@@ -4665,9 +4805,9 @@
                 <a:ea typeface="Verdana" pitchFamily="34" charset="-122"/>
                 <a:cs typeface="Verdana" pitchFamily="34" charset="-120"/>
               </a:rPr>
-              <a:t>1</a:t>
-            </a:r>
-            <a:endParaRPr lang="en-US" sz="2000" dirty="0"/>
+              <a:t>Feito com apoio de IA</a:t>
+            </a:r>
+            <a:endParaRPr lang="en-US" sz="1600" dirty="0"/>
           </a:p>
         </p:txBody>
       </p:sp>
@@ -4679,47 +4819,8 @@
         </p:nvSpPr>
         <p:spPr>
           <a:xfrm>
-            <a:off x="1554480" y="1828800"/>
-            <a:ext cx="2926080" cy="320040"/>
-          </a:xfrm>
-          <a:prstGeom prst="rect">
-            <a:avLst/>
-          </a:prstGeom>
-          <a:noFill/>
-          <a:ln/>
-        </p:spPr>
-        <p:txBody>
-          <a:bodyPr wrap="square" rtlCol="0" anchor="ctr"/>
-          <a:lstStyle/>
-          <a:p>
-            <a:pPr indent="0" marL="0">
-              <a:buNone/>
-            </a:pPr>
-            <a:r>
-              <a:rPr lang="en-US" sz="1350" b="1" dirty="0">
-                <a:solidFill>
-                  <a:srgbClr val="FFFFFF"/>
-                </a:solidFill>
-                <a:latin typeface="Verdana" pitchFamily="34" charset="0"/>
-                <a:ea typeface="Verdana" pitchFamily="34" charset="-122"/>
-                <a:cs typeface="Verdana" pitchFamily="34" charset="-120"/>
-              </a:rPr>
-              <a:t>Painel de risco</a:t>
-            </a:r>
-            <a:endParaRPr lang="en-US" sz="1350" dirty="0"/>
-          </a:p>
-        </p:txBody>
-      </p:sp>
-      <p:sp>
-        <p:nvSpPr>
-          <p:cNvPr id="7" name="Text 5"/>
-          <p:cNvSpPr/>
-          <p:nvPr/>
-        </p:nvSpPr>
-        <p:spPr>
-          <a:xfrm>
-            <a:off x="4480560" y="1847088"/>
-            <a:ext cx="6858000" cy="621792"/>
+            <a:off x="914400" y="2560320"/>
+            <a:ext cx="4754880" cy="2194560"/>
           </a:xfrm>
           <a:prstGeom prst="rect">
             <a:avLst/>
@@ -4733,12 +4834,12 @@
           <a:p>
             <a:pPr indent="0" marL="0">
               <a:lnSpc>
-                <a:spcPct val="110000"/>
+                <a:spcPct val="120000"/>
               </a:lnSpc>
               <a:buNone/>
             </a:pPr>
             <a:r>
-              <a:rPr lang="en-US" sz="1100" dirty="0">
+              <a:rPr lang="en-US" sz="1250" dirty="0">
                 <a:solidFill>
                   <a:srgbClr val="9FADBE"/>
                 </a:solidFill>
@@ -4746,26 +4847,84 @@
                 <a:ea typeface="Verdana" pitchFamily="34" charset="-122"/>
                 <a:cs typeface="Verdana" pitchFamily="34" charset="-120"/>
               </a:rPr>
-              <a:t>Entrar como coordenação. A turma ordenada por score, abrir o aluno do topo e mostrar as regras que produziram o número.</a:t>
-            </a:r>
-            <a:endParaRPr lang="en-US" sz="1100" dirty="0"/>
-          </a:p>
-        </p:txBody>
-      </p:sp>
-      <p:sp>
-        <p:nvSpPr>
-          <p:cNvPr id="8" name="Shape 6"/>
-          <p:cNvSpPr/>
-          <p:nvPr/>
-        </p:nvSpPr>
-        <p:spPr>
-          <a:xfrm>
-            <a:off x="640080" y="2651760"/>
-            <a:ext cx="10881360" cy="822960"/>
+              <a:t>• Boa parte do código: rotas, validações, interface e testes de tabela</a:t>
+            </a:r>
+            <a:endParaRPr lang="en-US" sz="1250" dirty="0"/>
+          </a:p>
+          <a:p>
+            <a:pPr indent="0" marL="0">
+              <a:lnSpc>
+                <a:spcPct val="120000"/>
+              </a:lnSpc>
+              <a:buNone/>
+            </a:pPr>
+            <a:endParaRPr lang="en-US" sz="1250" dirty="0"/>
+          </a:p>
+          <a:p>
+            <a:pPr indent="0" marL="0">
+              <a:lnSpc>
+                <a:spcPct val="120000"/>
+              </a:lnSpc>
+              <a:buNone/>
+            </a:pPr>
+            <a:r>
+              <a:rPr lang="en-US" sz="1250" dirty="0">
+                <a:solidFill>
+                  <a:srgbClr val="9FADBE"/>
+                </a:solidFill>
+                <a:latin typeface="Verdana" pitchFamily="34" charset="0"/>
+                <a:ea typeface="Verdana" pitchFamily="34" charset="-122"/>
+                <a:cs typeface="Verdana" pitchFamily="34" charset="-120"/>
+              </a:rPr>
+              <a:t>• Estruturação da documentação</a:t>
+            </a:r>
+            <a:endParaRPr lang="en-US" sz="1250" dirty="0"/>
+          </a:p>
+          <a:p>
+            <a:pPr indent="0" marL="0">
+              <a:lnSpc>
+                <a:spcPct val="120000"/>
+              </a:lnSpc>
+              <a:buNone/>
+            </a:pPr>
+            <a:endParaRPr lang="en-US" sz="1250" dirty="0"/>
+          </a:p>
+          <a:p>
+            <a:pPr indent="0" marL="0">
+              <a:lnSpc>
+                <a:spcPct val="120000"/>
+              </a:lnSpc>
+              <a:buNone/>
+            </a:pPr>
+            <a:r>
+              <a:rPr lang="en-US" sz="1250" dirty="0">
+                <a:solidFill>
+                  <a:srgbClr val="9FADBE"/>
+                </a:solidFill>
+                <a:latin typeface="Verdana" pitchFamily="34" charset="0"/>
+                <a:ea typeface="Verdana" pitchFamily="34" charset="-122"/>
+                <a:cs typeface="Verdana" pitchFamily="34" charset="-120"/>
+              </a:rPr>
+              <a:t>• Revisão de ortografia e clareza</a:t>
+            </a:r>
+            <a:endParaRPr lang="en-US" sz="1250" dirty="0"/>
+          </a:p>
+        </p:txBody>
+      </p:sp>
+      <p:sp>
+        <p:nvSpPr>
+          <p:cNvPr id="7" name="Shape 5"/>
+          <p:cNvSpPr/>
+          <p:nvPr/>
+        </p:nvSpPr>
+        <p:spPr>
+          <a:xfrm>
+            <a:off x="6263640" y="1828800"/>
+            <a:ext cx="5303520" cy="3200400"/>
           </a:xfrm>
           <a:prstGeom prst="roundRect">
             <a:avLst>
-              <a:gd name="adj" fmla="val 8889"/>
+              <a:gd name="adj" fmla="val 2286"/>
             </a:avLst>
           </a:prstGeom>
           <a:solidFill>
@@ -4781,40 +4940,198 @@
       </p:sp>
       <p:sp>
         <p:nvSpPr>
+          <p:cNvPr id="8" name="Text 6"/>
+          <p:cNvSpPr/>
+          <p:nvPr/>
+        </p:nvSpPr>
+        <p:spPr>
+          <a:xfrm>
+            <a:off x="6537960" y="2057400"/>
+            <a:ext cx="4754880" cy="365760"/>
+          </a:xfrm>
+          <a:prstGeom prst="rect">
+            <a:avLst/>
+          </a:prstGeom>
+          <a:noFill/>
+          <a:ln/>
+        </p:spPr>
+        <p:txBody>
+          <a:bodyPr wrap="square" rtlCol="0" anchor="ctr"/>
+          <a:lstStyle/>
+          <a:p>
+            <a:pPr indent="0" marL="0">
+              <a:buNone/>
+            </a:pPr>
+            <a:r>
+              <a:rPr lang="en-US" sz="1600" b="1" dirty="0">
+                <a:solidFill>
+                  <a:srgbClr val="45BD8A"/>
+                </a:solidFill>
+                <a:latin typeface="Verdana" pitchFamily="34" charset="0"/>
+                <a:ea typeface="Verdana" pitchFamily="34" charset="-122"/>
+                <a:cs typeface="Verdana" pitchFamily="34" charset="-120"/>
+              </a:rPr>
+              <a:t>Decisão do grupo</a:t>
+            </a:r>
+            <a:endParaRPr lang="en-US" sz="1600" dirty="0"/>
+          </a:p>
+        </p:txBody>
+      </p:sp>
+      <p:sp>
+        <p:nvSpPr>
           <p:cNvPr id="9" name="Text 7"/>
           <p:cNvSpPr/>
           <p:nvPr/>
         </p:nvSpPr>
         <p:spPr>
           <a:xfrm>
-            <a:off x="914400" y="2788920"/>
-            <a:ext cx="457200" cy="548640"/>
-          </a:xfrm>
-          <a:prstGeom prst="rect">
-            <a:avLst/>
-          </a:prstGeom>
-          <a:noFill/>
-          <a:ln/>
-        </p:spPr>
-        <p:txBody>
-          <a:bodyPr wrap="square" rtlCol="0" anchor="ctr"/>
-          <a:lstStyle/>
-          <a:p>
-            <a:pPr indent="0" marL="0">
-              <a:buNone/>
-            </a:pPr>
-            <a:r>
-              <a:rPr lang="en-US" sz="2000" b="1" dirty="0">
-                <a:solidFill>
-                  <a:srgbClr val="45BD8A"/>
-                </a:solidFill>
-                <a:latin typeface="Verdana" pitchFamily="34" charset="0"/>
-                <a:ea typeface="Verdana" pitchFamily="34" charset="-122"/>
-                <a:cs typeface="Verdana" pitchFamily="34" charset="-120"/>
-              </a:rPr>
-              <a:t>2</a:t>
-            </a:r>
-            <a:endParaRPr lang="en-US" sz="2000" dirty="0"/>
+            <a:off x="6537960" y="2560320"/>
+            <a:ext cx="4754880" cy="2286000"/>
+          </a:xfrm>
+          <a:prstGeom prst="rect">
+            <a:avLst/>
+          </a:prstGeom>
+          <a:noFill/>
+          <a:ln/>
+        </p:spPr>
+        <p:txBody>
+          <a:bodyPr wrap="square" rtlCol="0" anchor="ctr"/>
+          <a:lstStyle/>
+          <a:p>
+            <a:pPr indent="0" marL="0">
+              <a:lnSpc>
+                <a:spcPct val="120000"/>
+              </a:lnSpc>
+              <a:buNone/>
+            </a:pPr>
+            <a:r>
+              <a:rPr lang="en-US" sz="1250" dirty="0">
+                <a:solidFill>
+                  <a:srgbClr val="9FADBE"/>
+                </a:solidFill>
+                <a:latin typeface="Verdana" pitchFamily="34" charset="0"/>
+                <a:ea typeface="Verdana" pitchFamily="34" charset="-122"/>
+                <a:cs typeface="Verdana" pitchFamily="34" charset="-120"/>
+              </a:rPr>
+              <a:t>• A arquitetura e os ADRs</a:t>
+            </a:r>
+            <a:endParaRPr lang="en-US" sz="1250" dirty="0"/>
+          </a:p>
+          <a:p>
+            <a:pPr indent="0" marL="0">
+              <a:lnSpc>
+                <a:spcPct val="120000"/>
+              </a:lnSpc>
+              <a:buNone/>
+            </a:pPr>
+            <a:endParaRPr lang="en-US" sz="1250" dirty="0"/>
+          </a:p>
+          <a:p>
+            <a:pPr indent="0" marL="0">
+              <a:lnSpc>
+                <a:spcPct val="120000"/>
+              </a:lnSpc>
+              <a:buNone/>
+            </a:pPr>
+            <a:r>
+              <a:rPr lang="en-US" sz="1250" dirty="0">
+                <a:solidFill>
+                  <a:srgbClr val="9FADBE"/>
+                </a:solidFill>
+                <a:latin typeface="Verdana" pitchFamily="34" charset="0"/>
+                <a:ea typeface="Verdana" pitchFamily="34" charset="-122"/>
+                <a:cs typeface="Verdana" pitchFamily="34" charset="-120"/>
+              </a:rPr>
+              <a:t>• A calibração dos conjuntos e das 27 regras</a:t>
+            </a:r>
+            <a:endParaRPr lang="en-US" sz="1250" dirty="0"/>
+          </a:p>
+          <a:p>
+            <a:pPr indent="0" marL="0">
+              <a:lnSpc>
+                <a:spcPct val="120000"/>
+              </a:lnSpc>
+              <a:buNone/>
+            </a:pPr>
+            <a:endParaRPr lang="en-US" sz="1250" dirty="0"/>
+          </a:p>
+          <a:p>
+            <a:pPr indent="0" marL="0">
+              <a:lnSpc>
+                <a:spcPct val="120000"/>
+              </a:lnSpc>
+              <a:buNone/>
+            </a:pPr>
+            <a:r>
+              <a:rPr lang="en-US" sz="1250" dirty="0">
+                <a:solidFill>
+                  <a:srgbClr val="9FADBE"/>
+                </a:solidFill>
+                <a:latin typeface="Verdana" pitchFamily="34" charset="0"/>
+                <a:ea typeface="Verdana" pitchFamily="34" charset="-122"/>
+                <a:cs typeface="Verdana" pitchFamily="34" charset="-120"/>
+              </a:rPr>
+              <a:t>• Escrever o motor Mamdani do zero</a:t>
+            </a:r>
+            <a:endParaRPr lang="en-US" sz="1250" dirty="0"/>
+          </a:p>
+          <a:p>
+            <a:pPr indent="0" marL="0">
+              <a:lnSpc>
+                <a:spcPct val="120000"/>
+              </a:lnSpc>
+              <a:buNone/>
+            </a:pPr>
+            <a:endParaRPr lang="en-US" sz="1250" dirty="0"/>
+          </a:p>
+          <a:p>
+            <a:pPr indent="0" marL="0">
+              <a:lnSpc>
+                <a:spcPct val="120000"/>
+              </a:lnSpc>
+              <a:buNone/>
+            </a:pPr>
+            <a:r>
+              <a:rPr lang="en-US" sz="1250" dirty="0">
+                <a:solidFill>
+                  <a:srgbClr val="9FADBE"/>
+                </a:solidFill>
+                <a:latin typeface="Verdana" pitchFamily="34" charset="0"/>
+                <a:ea typeface="Verdana" pitchFamily="34" charset="-122"/>
+                <a:cs typeface="Verdana" pitchFamily="34" charset="-120"/>
+              </a:rPr>
+              <a:t>• Não mostrar o score ao aluno</a:t>
+            </a:r>
+            <a:endParaRPr lang="en-US" sz="1250" dirty="0"/>
+          </a:p>
+          <a:p>
+            <a:pPr indent="0" marL="0">
+              <a:lnSpc>
+                <a:spcPct val="120000"/>
+              </a:lnSpc>
+              <a:buNone/>
+            </a:pPr>
+            <a:endParaRPr lang="en-US" sz="1250" dirty="0"/>
+          </a:p>
+          <a:p>
+            <a:pPr indent="0" marL="0">
+              <a:lnSpc>
+                <a:spcPct val="120000"/>
+              </a:lnSpc>
+              <a:buNone/>
+            </a:pPr>
+            <a:r>
+              <a:rPr lang="en-US" sz="1250" dirty="0">
+                <a:solidFill>
+                  <a:srgbClr val="9FADBE"/>
+                </a:solidFill>
+                <a:latin typeface="Verdana" pitchFamily="34" charset="0"/>
+                <a:ea typeface="Verdana" pitchFamily="34" charset="-122"/>
+                <a:cs typeface="Verdana" pitchFamily="34" charset="-120"/>
+              </a:rPr>
+              <a:t>• O conjunto de avaliação e a leitura dos resultados</a:t>
+            </a:r>
+            <a:endParaRPr lang="en-US" sz="1250" dirty="0"/>
           </a:p>
         </p:txBody>
       </p:sp>
@@ -4826,523 +5143,40 @@
         </p:nvSpPr>
         <p:spPr>
           <a:xfrm>
-            <a:off x="1554480" y="2743200"/>
-            <a:ext cx="2926080" cy="320040"/>
-          </a:xfrm>
-          <a:prstGeom prst="rect">
-            <a:avLst/>
-          </a:prstGeom>
-          <a:noFill/>
-          <a:ln/>
-        </p:spPr>
-        <p:txBody>
-          <a:bodyPr wrap="square" rtlCol="0" anchor="ctr"/>
-          <a:lstStyle/>
-          <a:p>
-            <a:pPr indent="0" marL="0">
-              <a:buNone/>
-            </a:pPr>
-            <a:r>
-              <a:rPr lang="en-US" sz="1350" b="1" dirty="0">
-                <a:solidFill>
-                  <a:srgbClr val="FFFFFF"/>
-                </a:solidFill>
-                <a:latin typeface="Verdana" pitchFamily="34" charset="0"/>
-                <a:ea typeface="Verdana" pitchFamily="34" charset="-122"/>
-                <a:cs typeface="Verdana" pitchFamily="34" charset="-120"/>
-              </a:rPr>
-              <a:t>O caso central</a:t>
-            </a:r>
-            <a:endParaRPr lang="en-US" sz="1350" dirty="0"/>
+            <a:off x="640080" y="5303520"/>
+            <a:ext cx="10881360" cy="640080"/>
+          </a:xfrm>
+          <a:prstGeom prst="rect">
+            <a:avLst/>
+          </a:prstGeom>
+          <a:noFill/>
+          <a:ln/>
+        </p:spPr>
+        <p:txBody>
+          <a:bodyPr wrap="square" rtlCol="0" anchor="ctr"/>
+          <a:lstStyle/>
+          <a:p>
+            <a:pPr indent="0" marL="0">
+              <a:buNone/>
+            </a:pPr>
+            <a:r>
+              <a:rPr lang="en-US" sz="1300" b="1" dirty="0">
+                <a:solidFill>
+                  <a:srgbClr val="E6EAEF"/>
+                </a:solidFill>
+                <a:latin typeface="Verdana" pitchFamily="34" charset="0"/>
+                <a:ea typeface="Verdana" pitchFamily="34" charset="-122"/>
+                <a:cs typeface="Verdana" pitchFamily="34" charset="-120"/>
+              </a:rPr>
+              <a:t>Todo número deste trabalho sai de um script executável do repositório. Nenhum foi estimado. Onde não medimos, dissemos que não medimos.</a:t>
+            </a:r>
+            <a:endParaRPr lang="en-US" sz="1300" dirty="0"/>
           </a:p>
         </p:txBody>
       </p:sp>
       <p:sp>
         <p:nvSpPr>
           <p:cNvPr id="11" name="Text 9"/>
-          <p:cNvSpPr/>
-          <p:nvPr/>
-        </p:nvSpPr>
-        <p:spPr>
-          <a:xfrm>
-            <a:off x="4480560" y="2761488"/>
-            <a:ext cx="6858000" cy="621792"/>
-          </a:xfrm>
-          <a:prstGeom prst="rect">
-            <a:avLst/>
-          </a:prstGeom>
-          <a:noFill/>
-          <a:ln/>
-        </p:spPr>
-        <p:txBody>
-          <a:bodyPr wrap="square" rtlCol="0" anchor="ctr"/>
-          <a:lstStyle/>
-          <a:p>
-            <a:pPr indent="0" marL="0">
-              <a:lnSpc>
-                <a:spcPct val="110000"/>
-              </a:lnSpc>
-              <a:buNone/>
-            </a:pPr>
-            <a:r>
-              <a:rPr lang="en-US" sz="1100" dirty="0">
-                <a:solidFill>
-                  <a:srgbClr val="9FADBE"/>
-                </a:solidFill>
-                <a:latin typeface="Verdana" pitchFamily="34" charset="0"/>
-                <a:ea typeface="Verdana" pitchFamily="34" charset="-122"/>
-                <a:cs typeface="Verdana" pitchFamily="34" charset="-120"/>
-              </a:rPr>
-              <a:t>Frequência 34% com média 8,6. Risco alto pelo fuzzy, sem risco pelo critério de nota.</a:t>
-            </a:r>
-            <a:endParaRPr lang="en-US" sz="1100" dirty="0"/>
-          </a:p>
-        </p:txBody>
-      </p:sp>
-      <p:sp>
-        <p:nvSpPr>
-          <p:cNvPr id="12" name="Shape 10"/>
-          <p:cNvSpPr/>
-          <p:nvPr/>
-        </p:nvSpPr>
-        <p:spPr>
-          <a:xfrm>
-            <a:off x="640080" y="3566160"/>
-            <a:ext cx="10881360" cy="822960"/>
-          </a:xfrm>
-          <a:prstGeom prst="roundRect">
-            <a:avLst>
-              <a:gd name="adj" fmla="val 8889"/>
-            </a:avLst>
-          </a:prstGeom>
-          <a:solidFill>
-            <a:srgbClr val="141B26"/>
-          </a:solidFill>
-          <a:ln w="12700">
-            <a:solidFill>
-              <a:srgbClr val="2B3849"/>
-            </a:solidFill>
-            <a:prstDash val="solid"/>
-          </a:ln>
-        </p:spPr>
-      </p:sp>
-      <p:sp>
-        <p:nvSpPr>
-          <p:cNvPr id="13" name="Text 11"/>
-          <p:cNvSpPr/>
-          <p:nvPr/>
-        </p:nvSpPr>
-        <p:spPr>
-          <a:xfrm>
-            <a:off x="914400" y="3703320"/>
-            <a:ext cx="457200" cy="548640"/>
-          </a:xfrm>
-          <a:prstGeom prst="rect">
-            <a:avLst/>
-          </a:prstGeom>
-          <a:noFill/>
-          <a:ln/>
-        </p:spPr>
-        <p:txBody>
-          <a:bodyPr wrap="square" rtlCol="0" anchor="ctr"/>
-          <a:lstStyle/>
-          <a:p>
-            <a:pPr indent="0" marL="0">
-              <a:buNone/>
-            </a:pPr>
-            <a:r>
-              <a:rPr lang="en-US" sz="2000" b="1" dirty="0">
-                <a:solidFill>
-                  <a:srgbClr val="45BD8A"/>
-                </a:solidFill>
-                <a:latin typeface="Verdana" pitchFamily="34" charset="0"/>
-                <a:ea typeface="Verdana" pitchFamily="34" charset="-122"/>
-                <a:cs typeface="Verdana" pitchFamily="34" charset="-120"/>
-              </a:rPr>
-              <a:t>3</a:t>
-            </a:r>
-            <a:endParaRPr lang="en-US" sz="2000" dirty="0"/>
-          </a:p>
-        </p:txBody>
-      </p:sp>
-      <p:sp>
-        <p:nvSpPr>
-          <p:cNvPr id="14" name="Text 12"/>
-          <p:cNvSpPr/>
-          <p:nvPr/>
-        </p:nvSpPr>
-        <p:spPr>
-          <a:xfrm>
-            <a:off x="1554480" y="3657600"/>
-            <a:ext cx="2926080" cy="320040"/>
-          </a:xfrm>
-          <a:prstGeom prst="rect">
-            <a:avLst/>
-          </a:prstGeom>
-          <a:noFill/>
-          <a:ln/>
-        </p:spPr>
-        <p:txBody>
-          <a:bodyPr wrap="square" rtlCol="0" anchor="ctr"/>
-          <a:lstStyle/>
-          <a:p>
-            <a:pPr indent="0" marL="0">
-              <a:buNone/>
-            </a:pPr>
-            <a:r>
-              <a:rPr lang="en-US" sz="1350" b="1" dirty="0">
-                <a:solidFill>
-                  <a:srgbClr val="FFFFFF"/>
-                </a:solidFill>
-                <a:latin typeface="Verdana" pitchFamily="34" charset="0"/>
-                <a:ea typeface="Verdana" pitchFamily="34" charset="-122"/>
-                <a:cs typeface="Verdana" pitchFamily="34" charset="-120"/>
-              </a:rPr>
-              <a:t>Assistente respondendo</a:t>
-            </a:r>
-            <a:endParaRPr lang="en-US" sz="1350" dirty="0"/>
-          </a:p>
-        </p:txBody>
-      </p:sp>
-      <p:sp>
-        <p:nvSpPr>
-          <p:cNvPr id="15" name="Text 13"/>
-          <p:cNvSpPr/>
-          <p:nvPr/>
-        </p:nvSpPr>
-        <p:spPr>
-          <a:xfrm>
-            <a:off x="4480560" y="3675888"/>
-            <a:ext cx="6858000" cy="621792"/>
-          </a:xfrm>
-          <a:prstGeom prst="rect">
-            <a:avLst/>
-          </a:prstGeom>
-          <a:noFill/>
-          <a:ln/>
-        </p:spPr>
-        <p:txBody>
-          <a:bodyPr wrap="square" rtlCol="0" anchor="ctr"/>
-          <a:lstStyle/>
-          <a:p>
-            <a:pPr indent="0" marL="0">
-              <a:lnSpc>
-                <a:spcPct val="110000"/>
-              </a:lnSpc>
-              <a:buNone/>
-            </a:pPr>
-            <a:r>
-              <a:rPr lang="en-US" sz="1100" dirty="0">
-                <a:solidFill>
-                  <a:srgbClr val="9FADBE"/>
-                </a:solidFill>
-                <a:latin typeface="Verdana" pitchFamily="34" charset="0"/>
-                <a:ea typeface="Verdana" pitchFamily="34" charset="-122"/>
-                <a:cs typeface="Verdana" pitchFamily="34" charset="-120"/>
-              </a:rPr>
-              <a:t>Trocar para a conta de aluno: os dois papéis não se sobrepõem. "Quando é a Prova P1?" devolve a data com a fonte citada.</a:t>
-            </a:r>
-            <a:endParaRPr lang="en-US" sz="1100" dirty="0"/>
-          </a:p>
-        </p:txBody>
-      </p:sp>
-      <p:sp>
-        <p:nvSpPr>
-          <p:cNvPr id="16" name="Shape 14"/>
-          <p:cNvSpPr/>
-          <p:nvPr/>
-        </p:nvSpPr>
-        <p:spPr>
-          <a:xfrm>
-            <a:off x="640080" y="4480560"/>
-            <a:ext cx="10881360" cy="822960"/>
-          </a:xfrm>
-          <a:prstGeom prst="roundRect">
-            <a:avLst>
-              <a:gd name="adj" fmla="val 8889"/>
-            </a:avLst>
-          </a:prstGeom>
-          <a:solidFill>
-            <a:srgbClr val="141B26"/>
-          </a:solidFill>
-          <a:ln w="12700">
-            <a:solidFill>
-              <a:srgbClr val="2B3849"/>
-            </a:solidFill>
-            <a:prstDash val="solid"/>
-          </a:ln>
-        </p:spPr>
-      </p:sp>
-      <p:sp>
-        <p:nvSpPr>
-          <p:cNvPr id="17" name="Text 15"/>
-          <p:cNvSpPr/>
-          <p:nvPr/>
-        </p:nvSpPr>
-        <p:spPr>
-          <a:xfrm>
-            <a:off x="914400" y="4617720"/>
-            <a:ext cx="457200" cy="548640"/>
-          </a:xfrm>
-          <a:prstGeom prst="rect">
-            <a:avLst/>
-          </a:prstGeom>
-          <a:noFill/>
-          <a:ln/>
-        </p:spPr>
-        <p:txBody>
-          <a:bodyPr wrap="square" rtlCol="0" anchor="ctr"/>
-          <a:lstStyle/>
-          <a:p>
-            <a:pPr indent="0" marL="0">
-              <a:buNone/>
-            </a:pPr>
-            <a:r>
-              <a:rPr lang="en-US" sz="2000" b="1" dirty="0">
-                <a:solidFill>
-                  <a:srgbClr val="45BD8A"/>
-                </a:solidFill>
-                <a:latin typeface="Verdana" pitchFamily="34" charset="0"/>
-                <a:ea typeface="Verdana" pitchFamily="34" charset="-122"/>
-                <a:cs typeface="Verdana" pitchFamily="34" charset="-120"/>
-              </a:rPr>
-              <a:t>4</a:t>
-            </a:r>
-            <a:endParaRPr lang="en-US" sz="2000" dirty="0"/>
-          </a:p>
-        </p:txBody>
-      </p:sp>
-      <p:sp>
-        <p:nvSpPr>
-          <p:cNvPr id="18" name="Text 16"/>
-          <p:cNvSpPr/>
-          <p:nvPr/>
-        </p:nvSpPr>
-        <p:spPr>
-          <a:xfrm>
-            <a:off x="1554480" y="4572000"/>
-            <a:ext cx="2926080" cy="320040"/>
-          </a:xfrm>
-          <a:prstGeom prst="rect">
-            <a:avLst/>
-          </a:prstGeom>
-          <a:noFill/>
-          <a:ln/>
-        </p:spPr>
-        <p:txBody>
-          <a:bodyPr wrap="square" rtlCol="0" anchor="ctr"/>
-          <a:lstStyle/>
-          <a:p>
-            <a:pPr indent="0" marL="0">
-              <a:buNone/>
-            </a:pPr>
-            <a:r>
-              <a:rPr lang="en-US" sz="1350" b="1" dirty="0">
-                <a:solidFill>
-                  <a:srgbClr val="FFFFFF"/>
-                </a:solidFill>
-                <a:latin typeface="Verdana" pitchFamily="34" charset="0"/>
-                <a:ea typeface="Verdana" pitchFamily="34" charset="-122"/>
-                <a:cs typeface="Verdana" pitchFamily="34" charset="-120"/>
-              </a:rPr>
-              <a:t>Assistente enumerando</a:t>
-            </a:r>
-            <a:endParaRPr lang="en-US" sz="1350" dirty="0"/>
-          </a:p>
-        </p:txBody>
-      </p:sp>
-      <p:sp>
-        <p:nvSpPr>
-          <p:cNvPr id="19" name="Text 17"/>
-          <p:cNvSpPr/>
-          <p:nvPr/>
-        </p:nvSpPr>
-        <p:spPr>
-          <a:xfrm>
-            <a:off x="4480560" y="4590288"/>
-            <a:ext cx="6858000" cy="621792"/>
-          </a:xfrm>
-          <a:prstGeom prst="rect">
-            <a:avLst/>
-          </a:prstGeom>
-          <a:noFill/>
-          <a:ln/>
-        </p:spPr>
-        <p:txBody>
-          <a:bodyPr wrap="square" rtlCol="0" anchor="ctr"/>
-          <a:lstStyle/>
-          <a:p>
-            <a:pPr indent="0" marL="0">
-              <a:lnSpc>
-                <a:spcPct val="110000"/>
-              </a:lnSpc>
-              <a:buNone/>
-            </a:pPr>
-            <a:r>
-              <a:rPr lang="en-US" sz="1100" dirty="0">
-                <a:solidFill>
-                  <a:srgbClr val="9FADBE"/>
-                </a:solidFill>
-                <a:latin typeface="Verdana" pitchFamily="34" charset="0"/>
-                <a:ea typeface="Verdana" pitchFamily="34" charset="-122"/>
-                <a:cs typeface="Verdana" pitchFamily="34" charset="-120"/>
-              </a:rPr>
-              <a:t>"Quais são os temas de todas as aulas?" devolve o semestre inteiro, e não a aula que ficou em primeiro na busca.</a:t>
-            </a:r>
-            <a:endParaRPr lang="en-US" sz="1100" dirty="0"/>
-          </a:p>
-        </p:txBody>
-      </p:sp>
-      <p:sp>
-        <p:nvSpPr>
-          <p:cNvPr id="20" name="Shape 18"/>
-          <p:cNvSpPr/>
-          <p:nvPr/>
-        </p:nvSpPr>
-        <p:spPr>
-          <a:xfrm>
-            <a:off x="640080" y="5394960"/>
-            <a:ext cx="10881360" cy="822960"/>
-          </a:xfrm>
-          <a:prstGeom prst="roundRect">
-            <a:avLst>
-              <a:gd name="adj" fmla="val 8889"/>
-            </a:avLst>
-          </a:prstGeom>
-          <a:solidFill>
-            <a:srgbClr val="141B26"/>
-          </a:solidFill>
-          <a:ln w="12700">
-            <a:solidFill>
-              <a:srgbClr val="2B3849"/>
-            </a:solidFill>
-            <a:prstDash val="solid"/>
-          </a:ln>
-        </p:spPr>
-      </p:sp>
-      <p:sp>
-        <p:nvSpPr>
-          <p:cNvPr id="21" name="Text 19"/>
-          <p:cNvSpPr/>
-          <p:nvPr/>
-        </p:nvSpPr>
-        <p:spPr>
-          <a:xfrm>
-            <a:off x="914400" y="5532120"/>
-            <a:ext cx="457200" cy="548640"/>
-          </a:xfrm>
-          <a:prstGeom prst="rect">
-            <a:avLst/>
-          </a:prstGeom>
-          <a:noFill/>
-          <a:ln/>
-        </p:spPr>
-        <p:txBody>
-          <a:bodyPr wrap="square" rtlCol="0" anchor="ctr"/>
-          <a:lstStyle/>
-          <a:p>
-            <a:pPr indent="0" marL="0">
-              <a:buNone/>
-            </a:pPr>
-            <a:r>
-              <a:rPr lang="en-US" sz="2000" b="1" dirty="0">
-                <a:solidFill>
-                  <a:srgbClr val="45BD8A"/>
-                </a:solidFill>
-                <a:latin typeface="Verdana" pitchFamily="34" charset="0"/>
-                <a:ea typeface="Verdana" pitchFamily="34" charset="-122"/>
-                <a:cs typeface="Verdana" pitchFamily="34" charset="-120"/>
-              </a:rPr>
-              <a:t>5</a:t>
-            </a:r>
-            <a:endParaRPr lang="en-US" sz="2000" dirty="0"/>
-          </a:p>
-        </p:txBody>
-      </p:sp>
-      <p:sp>
-        <p:nvSpPr>
-          <p:cNvPr id="22" name="Text 20"/>
-          <p:cNvSpPr/>
-          <p:nvPr/>
-        </p:nvSpPr>
-        <p:spPr>
-          <a:xfrm>
-            <a:off x="1554480" y="5486400"/>
-            <a:ext cx="2926080" cy="320040"/>
-          </a:xfrm>
-          <a:prstGeom prst="rect">
-            <a:avLst/>
-          </a:prstGeom>
-          <a:noFill/>
-          <a:ln/>
-        </p:spPr>
-        <p:txBody>
-          <a:bodyPr wrap="square" rtlCol="0" anchor="ctr"/>
-          <a:lstStyle/>
-          <a:p>
-            <a:pPr indent="0" marL="0">
-              <a:buNone/>
-            </a:pPr>
-            <a:r>
-              <a:rPr lang="en-US" sz="1350" b="1" dirty="0">
-                <a:solidFill>
-                  <a:srgbClr val="FFFFFF"/>
-                </a:solidFill>
-                <a:latin typeface="Verdana" pitchFamily="34" charset="0"/>
-                <a:ea typeface="Verdana" pitchFamily="34" charset="-122"/>
-                <a:cs typeface="Verdana" pitchFamily="34" charset="-120"/>
-              </a:rPr>
-              <a:t>Assistente recusando</a:t>
-            </a:r>
-            <a:endParaRPr lang="en-US" sz="1350" dirty="0"/>
-          </a:p>
-        </p:txBody>
-      </p:sp>
-      <p:sp>
-        <p:nvSpPr>
-          <p:cNvPr id="23" name="Text 21"/>
-          <p:cNvSpPr/>
-          <p:nvPr/>
-        </p:nvSpPr>
-        <p:spPr>
-          <a:xfrm>
-            <a:off x="4480560" y="5504688"/>
-            <a:ext cx="6858000" cy="621792"/>
-          </a:xfrm>
-          <a:prstGeom prst="rect">
-            <a:avLst/>
-          </a:prstGeom>
-          <a:noFill/>
-          <a:ln/>
-        </p:spPr>
-        <p:txBody>
-          <a:bodyPr wrap="square" rtlCol="0" anchor="ctr"/>
-          <a:lstStyle/>
-          <a:p>
-            <a:pPr indent="0" marL="0">
-              <a:lnSpc>
-                <a:spcPct val="110000"/>
-              </a:lnSpc>
-              <a:buNone/>
-            </a:pPr>
-            <a:r>
-              <a:rPr lang="en-US" sz="1100" dirty="0">
-                <a:solidFill>
-                  <a:srgbClr val="9FADBE"/>
-                </a:solidFill>
-                <a:latin typeface="Verdana" pitchFamily="34" charset="0"/>
-                <a:ea typeface="Verdana" pitchFamily="34" charset="-122"/>
-                <a:cs typeface="Verdana" pitchFamily="34" charset="-120"/>
-              </a:rPr>
-              <a:t>"Qual o valor da mensalidade?" O sistema admite que não sabe.</a:t>
-            </a:r>
-            <a:endParaRPr lang="en-US" sz="1100" dirty="0"/>
-          </a:p>
-        </p:txBody>
-      </p:sp>
-      <p:sp>
-        <p:nvSpPr>
-          <p:cNvPr id="24" name="Text 22"/>
           <p:cNvSpPr/>
           <p:nvPr/>
         </p:nvSpPr>
@@ -5381,7 +5215,7 @@
       </p:sp>
       <p:sp>
         <p:nvSpPr>
-          <p:cNvPr id="25" name="Text 23"/>
+          <p:cNvPr id="12" name="Text 10"/>
           <p:cNvSpPr/>
           <p:nvPr/>
         </p:nvSpPr>
@@ -5429,6 +5263,929 @@
 <file path=ppt/slides/slide13.xml><?xml version="1.0" encoding="utf-8"?>
 <p:sld xmlns:a="http://schemas.openxmlformats.org/drawingml/2006/main" xmlns:r="http://schemas.openxmlformats.org/officeDocument/2006/relationships" xmlns:p="http://schemas.openxmlformats.org/presentationml/2006/main">
   <p:cSld name="Slide 13">
+    <p:bg>
+      <p:bgPr>
+        <a:solidFill>
+          <a:srgbClr val="0B1018"/>
+        </a:solidFill>
+      </p:bgPr>
+    </p:bg>
+    <p:spTree>
+      <p:nvGrpSpPr>
+        <p:cNvPr id="1" name=""/>
+        <p:cNvGrpSpPr/>
+        <p:nvPr/>
+      </p:nvGrpSpPr>
+      <p:grpSpPr>
+        <a:xfrm>
+          <a:off x="0" y="0"/>
+          <a:ext cx="0" cy="0"/>
+          <a:chOff x="0" y="0"/>
+          <a:chExt cx="0" cy="0"/>
+        </a:xfrm>
+      </p:grpSpPr>
+      <p:sp>
+        <p:nvSpPr>
+          <p:cNvPr id="2" name="Text 0"/>
+          <p:cNvSpPr/>
+          <p:nvPr/>
+        </p:nvSpPr>
+        <p:spPr>
+          <a:xfrm>
+            <a:off x="640080" y="457200"/>
+            <a:ext cx="10515600" cy="274320"/>
+          </a:xfrm>
+          <a:prstGeom prst="rect">
+            <a:avLst/>
+          </a:prstGeom>
+          <a:noFill/>
+          <a:ln/>
+        </p:spPr>
+        <p:txBody>
+          <a:bodyPr wrap="square" rtlCol="0" anchor="ctr"/>
+          <a:lstStyle/>
+          <a:p>
+            <a:pPr indent="0" marL="0">
+              <a:buNone/>
+            </a:pPr>
+            <a:r>
+              <a:rPr lang="en-US" sz="1100" b="1" spc="200" kern="0" dirty="0">
+                <a:solidFill>
+                  <a:srgbClr val="45BD8A"/>
+                </a:solidFill>
+                <a:latin typeface="Verdana" pitchFamily="34" charset="0"/>
+                <a:ea typeface="Verdana" pitchFamily="34" charset="-122"/>
+                <a:cs typeface="Verdana" pitchFamily="34" charset="-120"/>
+              </a:rPr>
+              <a:t>DEMONSTRAÇÃO</a:t>
+            </a:r>
+            <a:endParaRPr lang="en-US" sz="1100" dirty="0"/>
+          </a:p>
+        </p:txBody>
+      </p:sp>
+      <p:sp>
+        <p:nvSpPr>
+          <p:cNvPr id="3" name="Text 1"/>
+          <p:cNvSpPr/>
+          <p:nvPr/>
+        </p:nvSpPr>
+        <p:spPr>
+          <a:xfrm>
+            <a:off x="640080" y="777240"/>
+            <a:ext cx="10972800" cy="822960"/>
+          </a:xfrm>
+          <a:prstGeom prst="rect">
+            <a:avLst/>
+          </a:prstGeom>
+          <a:noFill/>
+          <a:ln/>
+        </p:spPr>
+        <p:txBody>
+          <a:bodyPr wrap="square" rtlCol="0" anchor="ctr"/>
+          <a:lstStyle/>
+          <a:p>
+            <a:pPr indent="0" marL="0">
+              <a:buNone/>
+            </a:pPr>
+            <a:r>
+              <a:rPr lang="en-US" sz="2800" b="1" dirty="0">
+                <a:solidFill>
+                  <a:srgbClr val="FFFFFF"/>
+                </a:solidFill>
+                <a:latin typeface="Verdana" pitchFamily="34" charset="0"/>
+                <a:ea typeface="Verdana" pitchFamily="34" charset="-122"/>
+                <a:cs typeface="Verdana" pitchFamily="34" charset="-120"/>
+              </a:rPr>
+              <a:t>Ao vivo, em permaneia.vercel.app</a:t>
+            </a:r>
+            <a:endParaRPr lang="en-US" sz="2800" dirty="0"/>
+          </a:p>
+        </p:txBody>
+      </p:sp>
+      <p:sp>
+        <p:nvSpPr>
+          <p:cNvPr id="4" name="Shape 2"/>
+          <p:cNvSpPr/>
+          <p:nvPr/>
+        </p:nvSpPr>
+        <p:spPr>
+          <a:xfrm>
+            <a:off x="640080" y="1737360"/>
+            <a:ext cx="10881360" cy="822960"/>
+          </a:xfrm>
+          <a:prstGeom prst="roundRect">
+            <a:avLst>
+              <a:gd name="adj" fmla="val 8889"/>
+            </a:avLst>
+          </a:prstGeom>
+          <a:solidFill>
+            <a:srgbClr val="141B26"/>
+          </a:solidFill>
+          <a:ln w="12700">
+            <a:solidFill>
+              <a:srgbClr val="2B3849"/>
+            </a:solidFill>
+            <a:prstDash val="solid"/>
+          </a:ln>
+        </p:spPr>
+      </p:sp>
+      <p:sp>
+        <p:nvSpPr>
+          <p:cNvPr id="5" name="Text 3"/>
+          <p:cNvSpPr/>
+          <p:nvPr/>
+        </p:nvSpPr>
+        <p:spPr>
+          <a:xfrm>
+            <a:off x="914400" y="1874520"/>
+            <a:ext cx="457200" cy="548640"/>
+          </a:xfrm>
+          <a:prstGeom prst="rect">
+            <a:avLst/>
+          </a:prstGeom>
+          <a:noFill/>
+          <a:ln/>
+        </p:spPr>
+        <p:txBody>
+          <a:bodyPr wrap="square" rtlCol="0" anchor="ctr"/>
+          <a:lstStyle/>
+          <a:p>
+            <a:pPr indent="0" marL="0">
+              <a:buNone/>
+            </a:pPr>
+            <a:r>
+              <a:rPr lang="en-US" sz="2000" b="1" dirty="0">
+                <a:solidFill>
+                  <a:srgbClr val="45BD8A"/>
+                </a:solidFill>
+                <a:latin typeface="Verdana" pitchFamily="34" charset="0"/>
+                <a:ea typeface="Verdana" pitchFamily="34" charset="-122"/>
+                <a:cs typeface="Verdana" pitchFamily="34" charset="-120"/>
+              </a:rPr>
+              <a:t>1</a:t>
+            </a:r>
+            <a:endParaRPr lang="en-US" sz="2000" dirty="0"/>
+          </a:p>
+        </p:txBody>
+      </p:sp>
+      <p:sp>
+        <p:nvSpPr>
+          <p:cNvPr id="6" name="Text 4"/>
+          <p:cNvSpPr/>
+          <p:nvPr/>
+        </p:nvSpPr>
+        <p:spPr>
+          <a:xfrm>
+            <a:off x="1554480" y="1828800"/>
+            <a:ext cx="2926080" cy="320040"/>
+          </a:xfrm>
+          <a:prstGeom prst="rect">
+            <a:avLst/>
+          </a:prstGeom>
+          <a:noFill/>
+          <a:ln/>
+        </p:spPr>
+        <p:txBody>
+          <a:bodyPr wrap="square" rtlCol="0" anchor="ctr"/>
+          <a:lstStyle/>
+          <a:p>
+            <a:pPr indent="0" marL="0">
+              <a:buNone/>
+            </a:pPr>
+            <a:r>
+              <a:rPr lang="en-US" sz="1350" b="1" dirty="0">
+                <a:solidFill>
+                  <a:srgbClr val="FFFFFF"/>
+                </a:solidFill>
+                <a:latin typeface="Verdana" pitchFamily="34" charset="0"/>
+                <a:ea typeface="Verdana" pitchFamily="34" charset="-122"/>
+                <a:cs typeface="Verdana" pitchFamily="34" charset="-120"/>
+              </a:rPr>
+              <a:t>Painel de risco</a:t>
+            </a:r>
+            <a:endParaRPr lang="en-US" sz="1350" dirty="0"/>
+          </a:p>
+        </p:txBody>
+      </p:sp>
+      <p:sp>
+        <p:nvSpPr>
+          <p:cNvPr id="7" name="Text 5"/>
+          <p:cNvSpPr/>
+          <p:nvPr/>
+        </p:nvSpPr>
+        <p:spPr>
+          <a:xfrm>
+            <a:off x="4480560" y="1847088"/>
+            <a:ext cx="6858000" cy="621792"/>
+          </a:xfrm>
+          <a:prstGeom prst="rect">
+            <a:avLst/>
+          </a:prstGeom>
+          <a:noFill/>
+          <a:ln/>
+        </p:spPr>
+        <p:txBody>
+          <a:bodyPr wrap="square" rtlCol="0" anchor="ctr"/>
+          <a:lstStyle/>
+          <a:p>
+            <a:pPr indent="0" marL="0">
+              <a:lnSpc>
+                <a:spcPct val="110000"/>
+              </a:lnSpc>
+              <a:buNone/>
+            </a:pPr>
+            <a:r>
+              <a:rPr lang="en-US" sz="1100" dirty="0">
+                <a:solidFill>
+                  <a:srgbClr val="9FADBE"/>
+                </a:solidFill>
+                <a:latin typeface="Verdana" pitchFamily="34" charset="0"/>
+                <a:ea typeface="Verdana" pitchFamily="34" charset="-122"/>
+                <a:cs typeface="Verdana" pitchFamily="34" charset="-120"/>
+              </a:rPr>
+              <a:t>Entrar como coordenação. A turma ordenada por score, abrir o aluno do topo e mostrar as regras que produziram o número.</a:t>
+            </a:r>
+            <a:endParaRPr lang="en-US" sz="1100" dirty="0"/>
+          </a:p>
+        </p:txBody>
+      </p:sp>
+      <p:sp>
+        <p:nvSpPr>
+          <p:cNvPr id="8" name="Shape 6"/>
+          <p:cNvSpPr/>
+          <p:nvPr/>
+        </p:nvSpPr>
+        <p:spPr>
+          <a:xfrm>
+            <a:off x="640080" y="2651760"/>
+            <a:ext cx="10881360" cy="822960"/>
+          </a:xfrm>
+          <a:prstGeom prst="roundRect">
+            <a:avLst>
+              <a:gd name="adj" fmla="val 8889"/>
+            </a:avLst>
+          </a:prstGeom>
+          <a:solidFill>
+            <a:srgbClr val="141B26"/>
+          </a:solidFill>
+          <a:ln w="12700">
+            <a:solidFill>
+              <a:srgbClr val="2B3849"/>
+            </a:solidFill>
+            <a:prstDash val="solid"/>
+          </a:ln>
+        </p:spPr>
+      </p:sp>
+      <p:sp>
+        <p:nvSpPr>
+          <p:cNvPr id="9" name="Text 7"/>
+          <p:cNvSpPr/>
+          <p:nvPr/>
+        </p:nvSpPr>
+        <p:spPr>
+          <a:xfrm>
+            <a:off x="914400" y="2788920"/>
+            <a:ext cx="457200" cy="548640"/>
+          </a:xfrm>
+          <a:prstGeom prst="rect">
+            <a:avLst/>
+          </a:prstGeom>
+          <a:noFill/>
+          <a:ln/>
+        </p:spPr>
+        <p:txBody>
+          <a:bodyPr wrap="square" rtlCol="0" anchor="ctr"/>
+          <a:lstStyle/>
+          <a:p>
+            <a:pPr indent="0" marL="0">
+              <a:buNone/>
+            </a:pPr>
+            <a:r>
+              <a:rPr lang="en-US" sz="2000" b="1" dirty="0">
+                <a:solidFill>
+                  <a:srgbClr val="45BD8A"/>
+                </a:solidFill>
+                <a:latin typeface="Verdana" pitchFamily="34" charset="0"/>
+                <a:ea typeface="Verdana" pitchFamily="34" charset="-122"/>
+                <a:cs typeface="Verdana" pitchFamily="34" charset="-120"/>
+              </a:rPr>
+              <a:t>2</a:t>
+            </a:r>
+            <a:endParaRPr lang="en-US" sz="2000" dirty="0"/>
+          </a:p>
+        </p:txBody>
+      </p:sp>
+      <p:sp>
+        <p:nvSpPr>
+          <p:cNvPr id="10" name="Text 8"/>
+          <p:cNvSpPr/>
+          <p:nvPr/>
+        </p:nvSpPr>
+        <p:spPr>
+          <a:xfrm>
+            <a:off x="1554480" y="2743200"/>
+            <a:ext cx="2926080" cy="320040"/>
+          </a:xfrm>
+          <a:prstGeom prst="rect">
+            <a:avLst/>
+          </a:prstGeom>
+          <a:noFill/>
+          <a:ln/>
+        </p:spPr>
+        <p:txBody>
+          <a:bodyPr wrap="square" rtlCol="0" anchor="ctr"/>
+          <a:lstStyle/>
+          <a:p>
+            <a:pPr indent="0" marL="0">
+              <a:buNone/>
+            </a:pPr>
+            <a:r>
+              <a:rPr lang="en-US" sz="1350" b="1" dirty="0">
+                <a:solidFill>
+                  <a:srgbClr val="FFFFFF"/>
+                </a:solidFill>
+                <a:latin typeface="Verdana" pitchFamily="34" charset="0"/>
+                <a:ea typeface="Verdana" pitchFamily="34" charset="-122"/>
+                <a:cs typeface="Verdana" pitchFamily="34" charset="-120"/>
+              </a:rPr>
+              <a:t>O caso central</a:t>
+            </a:r>
+            <a:endParaRPr lang="en-US" sz="1350" dirty="0"/>
+          </a:p>
+        </p:txBody>
+      </p:sp>
+      <p:sp>
+        <p:nvSpPr>
+          <p:cNvPr id="11" name="Text 9"/>
+          <p:cNvSpPr/>
+          <p:nvPr/>
+        </p:nvSpPr>
+        <p:spPr>
+          <a:xfrm>
+            <a:off x="4480560" y="2761488"/>
+            <a:ext cx="6858000" cy="621792"/>
+          </a:xfrm>
+          <a:prstGeom prst="rect">
+            <a:avLst/>
+          </a:prstGeom>
+          <a:noFill/>
+          <a:ln/>
+        </p:spPr>
+        <p:txBody>
+          <a:bodyPr wrap="square" rtlCol="0" anchor="ctr"/>
+          <a:lstStyle/>
+          <a:p>
+            <a:pPr indent="0" marL="0">
+              <a:lnSpc>
+                <a:spcPct val="110000"/>
+              </a:lnSpc>
+              <a:buNone/>
+            </a:pPr>
+            <a:r>
+              <a:rPr lang="en-US" sz="1100" dirty="0">
+                <a:solidFill>
+                  <a:srgbClr val="9FADBE"/>
+                </a:solidFill>
+                <a:latin typeface="Verdana" pitchFamily="34" charset="0"/>
+                <a:ea typeface="Verdana" pitchFamily="34" charset="-122"/>
+                <a:cs typeface="Verdana" pitchFamily="34" charset="-120"/>
+              </a:rPr>
+              <a:t>Frequência 34% com média 8,6. Risco alto pelo fuzzy, sem risco pelo critério de nota.</a:t>
+            </a:r>
+            <a:endParaRPr lang="en-US" sz="1100" dirty="0"/>
+          </a:p>
+        </p:txBody>
+      </p:sp>
+      <p:sp>
+        <p:nvSpPr>
+          <p:cNvPr id="12" name="Shape 10"/>
+          <p:cNvSpPr/>
+          <p:nvPr/>
+        </p:nvSpPr>
+        <p:spPr>
+          <a:xfrm>
+            <a:off x="640080" y="3566160"/>
+            <a:ext cx="10881360" cy="822960"/>
+          </a:xfrm>
+          <a:prstGeom prst="roundRect">
+            <a:avLst>
+              <a:gd name="adj" fmla="val 8889"/>
+            </a:avLst>
+          </a:prstGeom>
+          <a:solidFill>
+            <a:srgbClr val="141B26"/>
+          </a:solidFill>
+          <a:ln w="12700">
+            <a:solidFill>
+              <a:srgbClr val="2B3849"/>
+            </a:solidFill>
+            <a:prstDash val="solid"/>
+          </a:ln>
+        </p:spPr>
+      </p:sp>
+      <p:sp>
+        <p:nvSpPr>
+          <p:cNvPr id="13" name="Text 11"/>
+          <p:cNvSpPr/>
+          <p:nvPr/>
+        </p:nvSpPr>
+        <p:spPr>
+          <a:xfrm>
+            <a:off x="914400" y="3703320"/>
+            <a:ext cx="457200" cy="548640"/>
+          </a:xfrm>
+          <a:prstGeom prst="rect">
+            <a:avLst/>
+          </a:prstGeom>
+          <a:noFill/>
+          <a:ln/>
+        </p:spPr>
+        <p:txBody>
+          <a:bodyPr wrap="square" rtlCol="0" anchor="ctr"/>
+          <a:lstStyle/>
+          <a:p>
+            <a:pPr indent="0" marL="0">
+              <a:buNone/>
+            </a:pPr>
+            <a:r>
+              <a:rPr lang="en-US" sz="2000" b="1" dirty="0">
+                <a:solidFill>
+                  <a:srgbClr val="45BD8A"/>
+                </a:solidFill>
+                <a:latin typeface="Verdana" pitchFamily="34" charset="0"/>
+                <a:ea typeface="Verdana" pitchFamily="34" charset="-122"/>
+                <a:cs typeface="Verdana" pitchFamily="34" charset="-120"/>
+              </a:rPr>
+              <a:t>3</a:t>
+            </a:r>
+            <a:endParaRPr lang="en-US" sz="2000" dirty="0"/>
+          </a:p>
+        </p:txBody>
+      </p:sp>
+      <p:sp>
+        <p:nvSpPr>
+          <p:cNvPr id="14" name="Text 12"/>
+          <p:cNvSpPr/>
+          <p:nvPr/>
+        </p:nvSpPr>
+        <p:spPr>
+          <a:xfrm>
+            <a:off x="1554480" y="3657600"/>
+            <a:ext cx="2926080" cy="320040"/>
+          </a:xfrm>
+          <a:prstGeom prst="rect">
+            <a:avLst/>
+          </a:prstGeom>
+          <a:noFill/>
+          <a:ln/>
+        </p:spPr>
+        <p:txBody>
+          <a:bodyPr wrap="square" rtlCol="0" anchor="ctr"/>
+          <a:lstStyle/>
+          <a:p>
+            <a:pPr indent="0" marL="0">
+              <a:buNone/>
+            </a:pPr>
+            <a:r>
+              <a:rPr lang="en-US" sz="1350" b="1" dirty="0">
+                <a:solidFill>
+                  <a:srgbClr val="FFFFFF"/>
+                </a:solidFill>
+                <a:latin typeface="Verdana" pitchFamily="34" charset="0"/>
+                <a:ea typeface="Verdana" pitchFamily="34" charset="-122"/>
+                <a:cs typeface="Verdana" pitchFamily="34" charset="-120"/>
+              </a:rPr>
+              <a:t>Assistente respondendo</a:t>
+            </a:r>
+            <a:endParaRPr lang="en-US" sz="1350" dirty="0"/>
+          </a:p>
+        </p:txBody>
+      </p:sp>
+      <p:sp>
+        <p:nvSpPr>
+          <p:cNvPr id="15" name="Text 13"/>
+          <p:cNvSpPr/>
+          <p:nvPr/>
+        </p:nvSpPr>
+        <p:spPr>
+          <a:xfrm>
+            <a:off x="4480560" y="3675888"/>
+            <a:ext cx="6858000" cy="621792"/>
+          </a:xfrm>
+          <a:prstGeom prst="rect">
+            <a:avLst/>
+          </a:prstGeom>
+          <a:noFill/>
+          <a:ln/>
+        </p:spPr>
+        <p:txBody>
+          <a:bodyPr wrap="square" rtlCol="0" anchor="ctr"/>
+          <a:lstStyle/>
+          <a:p>
+            <a:pPr indent="0" marL="0">
+              <a:lnSpc>
+                <a:spcPct val="110000"/>
+              </a:lnSpc>
+              <a:buNone/>
+            </a:pPr>
+            <a:r>
+              <a:rPr lang="en-US" sz="1100" dirty="0">
+                <a:solidFill>
+                  <a:srgbClr val="9FADBE"/>
+                </a:solidFill>
+                <a:latin typeface="Verdana" pitchFamily="34" charset="0"/>
+                <a:ea typeface="Verdana" pitchFamily="34" charset="-122"/>
+                <a:cs typeface="Verdana" pitchFamily="34" charset="-120"/>
+              </a:rPr>
+              <a:t>Trocar para a conta de aluno: os dois papéis não se sobrepõem. "Quando é a Prova P1?" devolve a data com a fonte citada.</a:t>
+            </a:r>
+            <a:endParaRPr lang="en-US" sz="1100" dirty="0"/>
+          </a:p>
+        </p:txBody>
+      </p:sp>
+      <p:sp>
+        <p:nvSpPr>
+          <p:cNvPr id="16" name="Shape 14"/>
+          <p:cNvSpPr/>
+          <p:nvPr/>
+        </p:nvSpPr>
+        <p:spPr>
+          <a:xfrm>
+            <a:off x="640080" y="4480560"/>
+            <a:ext cx="10881360" cy="822960"/>
+          </a:xfrm>
+          <a:prstGeom prst="roundRect">
+            <a:avLst>
+              <a:gd name="adj" fmla="val 8889"/>
+            </a:avLst>
+          </a:prstGeom>
+          <a:solidFill>
+            <a:srgbClr val="141B26"/>
+          </a:solidFill>
+          <a:ln w="12700">
+            <a:solidFill>
+              <a:srgbClr val="2B3849"/>
+            </a:solidFill>
+            <a:prstDash val="solid"/>
+          </a:ln>
+        </p:spPr>
+      </p:sp>
+      <p:sp>
+        <p:nvSpPr>
+          <p:cNvPr id="17" name="Text 15"/>
+          <p:cNvSpPr/>
+          <p:nvPr/>
+        </p:nvSpPr>
+        <p:spPr>
+          <a:xfrm>
+            <a:off x="914400" y="4617720"/>
+            <a:ext cx="457200" cy="548640"/>
+          </a:xfrm>
+          <a:prstGeom prst="rect">
+            <a:avLst/>
+          </a:prstGeom>
+          <a:noFill/>
+          <a:ln/>
+        </p:spPr>
+        <p:txBody>
+          <a:bodyPr wrap="square" rtlCol="0" anchor="ctr"/>
+          <a:lstStyle/>
+          <a:p>
+            <a:pPr indent="0" marL="0">
+              <a:buNone/>
+            </a:pPr>
+            <a:r>
+              <a:rPr lang="en-US" sz="2000" b="1" dirty="0">
+                <a:solidFill>
+                  <a:srgbClr val="45BD8A"/>
+                </a:solidFill>
+                <a:latin typeface="Verdana" pitchFamily="34" charset="0"/>
+                <a:ea typeface="Verdana" pitchFamily="34" charset="-122"/>
+                <a:cs typeface="Verdana" pitchFamily="34" charset="-120"/>
+              </a:rPr>
+              <a:t>4</a:t>
+            </a:r>
+            <a:endParaRPr lang="en-US" sz="2000" dirty="0"/>
+          </a:p>
+        </p:txBody>
+      </p:sp>
+      <p:sp>
+        <p:nvSpPr>
+          <p:cNvPr id="18" name="Text 16"/>
+          <p:cNvSpPr/>
+          <p:nvPr/>
+        </p:nvSpPr>
+        <p:spPr>
+          <a:xfrm>
+            <a:off x="1554480" y="4572000"/>
+            <a:ext cx="2926080" cy="320040"/>
+          </a:xfrm>
+          <a:prstGeom prst="rect">
+            <a:avLst/>
+          </a:prstGeom>
+          <a:noFill/>
+          <a:ln/>
+        </p:spPr>
+        <p:txBody>
+          <a:bodyPr wrap="square" rtlCol="0" anchor="ctr"/>
+          <a:lstStyle/>
+          <a:p>
+            <a:pPr indent="0" marL="0">
+              <a:buNone/>
+            </a:pPr>
+            <a:r>
+              <a:rPr lang="en-US" sz="1350" b="1" dirty="0">
+                <a:solidFill>
+                  <a:srgbClr val="FFFFFF"/>
+                </a:solidFill>
+                <a:latin typeface="Verdana" pitchFamily="34" charset="0"/>
+                <a:ea typeface="Verdana" pitchFamily="34" charset="-122"/>
+                <a:cs typeface="Verdana" pitchFamily="34" charset="-120"/>
+              </a:rPr>
+              <a:t>Assistente enumerando</a:t>
+            </a:r>
+            <a:endParaRPr lang="en-US" sz="1350" dirty="0"/>
+          </a:p>
+        </p:txBody>
+      </p:sp>
+      <p:sp>
+        <p:nvSpPr>
+          <p:cNvPr id="19" name="Text 17"/>
+          <p:cNvSpPr/>
+          <p:nvPr/>
+        </p:nvSpPr>
+        <p:spPr>
+          <a:xfrm>
+            <a:off x="4480560" y="4590288"/>
+            <a:ext cx="6858000" cy="621792"/>
+          </a:xfrm>
+          <a:prstGeom prst="rect">
+            <a:avLst/>
+          </a:prstGeom>
+          <a:noFill/>
+          <a:ln/>
+        </p:spPr>
+        <p:txBody>
+          <a:bodyPr wrap="square" rtlCol="0" anchor="ctr"/>
+          <a:lstStyle/>
+          <a:p>
+            <a:pPr indent="0" marL="0">
+              <a:lnSpc>
+                <a:spcPct val="110000"/>
+              </a:lnSpc>
+              <a:buNone/>
+            </a:pPr>
+            <a:r>
+              <a:rPr lang="en-US" sz="1100" dirty="0">
+                <a:solidFill>
+                  <a:srgbClr val="9FADBE"/>
+                </a:solidFill>
+                <a:latin typeface="Verdana" pitchFamily="34" charset="0"/>
+                <a:ea typeface="Verdana" pitchFamily="34" charset="-122"/>
+                <a:cs typeface="Verdana" pitchFamily="34" charset="-120"/>
+              </a:rPr>
+              <a:t>"Quais são os temas de todas as aulas?" devolve o semestre inteiro, e não a aula que ficou em primeiro na busca.</a:t>
+            </a:r>
+            <a:endParaRPr lang="en-US" sz="1100" dirty="0"/>
+          </a:p>
+        </p:txBody>
+      </p:sp>
+      <p:sp>
+        <p:nvSpPr>
+          <p:cNvPr id="20" name="Shape 18"/>
+          <p:cNvSpPr/>
+          <p:nvPr/>
+        </p:nvSpPr>
+        <p:spPr>
+          <a:xfrm>
+            <a:off x="640080" y="5394960"/>
+            <a:ext cx="10881360" cy="822960"/>
+          </a:xfrm>
+          <a:prstGeom prst="roundRect">
+            <a:avLst>
+              <a:gd name="adj" fmla="val 8889"/>
+            </a:avLst>
+          </a:prstGeom>
+          <a:solidFill>
+            <a:srgbClr val="141B26"/>
+          </a:solidFill>
+          <a:ln w="12700">
+            <a:solidFill>
+              <a:srgbClr val="2B3849"/>
+            </a:solidFill>
+            <a:prstDash val="solid"/>
+          </a:ln>
+        </p:spPr>
+      </p:sp>
+      <p:sp>
+        <p:nvSpPr>
+          <p:cNvPr id="21" name="Text 19"/>
+          <p:cNvSpPr/>
+          <p:nvPr/>
+        </p:nvSpPr>
+        <p:spPr>
+          <a:xfrm>
+            <a:off x="914400" y="5532120"/>
+            <a:ext cx="457200" cy="548640"/>
+          </a:xfrm>
+          <a:prstGeom prst="rect">
+            <a:avLst/>
+          </a:prstGeom>
+          <a:noFill/>
+          <a:ln/>
+        </p:spPr>
+        <p:txBody>
+          <a:bodyPr wrap="square" rtlCol="0" anchor="ctr"/>
+          <a:lstStyle/>
+          <a:p>
+            <a:pPr indent="0" marL="0">
+              <a:buNone/>
+            </a:pPr>
+            <a:r>
+              <a:rPr lang="en-US" sz="2000" b="1" dirty="0">
+                <a:solidFill>
+                  <a:srgbClr val="45BD8A"/>
+                </a:solidFill>
+                <a:latin typeface="Verdana" pitchFamily="34" charset="0"/>
+                <a:ea typeface="Verdana" pitchFamily="34" charset="-122"/>
+                <a:cs typeface="Verdana" pitchFamily="34" charset="-120"/>
+              </a:rPr>
+              <a:t>5</a:t>
+            </a:r>
+            <a:endParaRPr lang="en-US" sz="2000" dirty="0"/>
+          </a:p>
+        </p:txBody>
+      </p:sp>
+      <p:sp>
+        <p:nvSpPr>
+          <p:cNvPr id="22" name="Text 20"/>
+          <p:cNvSpPr/>
+          <p:nvPr/>
+        </p:nvSpPr>
+        <p:spPr>
+          <a:xfrm>
+            <a:off x="1554480" y="5486400"/>
+            <a:ext cx="2926080" cy="320040"/>
+          </a:xfrm>
+          <a:prstGeom prst="rect">
+            <a:avLst/>
+          </a:prstGeom>
+          <a:noFill/>
+          <a:ln/>
+        </p:spPr>
+        <p:txBody>
+          <a:bodyPr wrap="square" rtlCol="0" anchor="ctr"/>
+          <a:lstStyle/>
+          <a:p>
+            <a:pPr indent="0" marL="0">
+              <a:buNone/>
+            </a:pPr>
+            <a:r>
+              <a:rPr lang="en-US" sz="1350" b="1" dirty="0">
+                <a:solidFill>
+                  <a:srgbClr val="FFFFFF"/>
+                </a:solidFill>
+                <a:latin typeface="Verdana" pitchFamily="34" charset="0"/>
+                <a:ea typeface="Verdana" pitchFamily="34" charset="-122"/>
+                <a:cs typeface="Verdana" pitchFamily="34" charset="-120"/>
+              </a:rPr>
+              <a:t>Assistente recusando</a:t>
+            </a:r>
+            <a:endParaRPr lang="en-US" sz="1350" dirty="0"/>
+          </a:p>
+        </p:txBody>
+      </p:sp>
+      <p:sp>
+        <p:nvSpPr>
+          <p:cNvPr id="23" name="Text 21"/>
+          <p:cNvSpPr/>
+          <p:nvPr/>
+        </p:nvSpPr>
+        <p:spPr>
+          <a:xfrm>
+            <a:off x="4480560" y="5504688"/>
+            <a:ext cx="6858000" cy="621792"/>
+          </a:xfrm>
+          <a:prstGeom prst="rect">
+            <a:avLst/>
+          </a:prstGeom>
+          <a:noFill/>
+          <a:ln/>
+        </p:spPr>
+        <p:txBody>
+          <a:bodyPr wrap="square" rtlCol="0" anchor="ctr"/>
+          <a:lstStyle/>
+          <a:p>
+            <a:pPr indent="0" marL="0">
+              <a:lnSpc>
+                <a:spcPct val="110000"/>
+              </a:lnSpc>
+              <a:buNone/>
+            </a:pPr>
+            <a:r>
+              <a:rPr lang="en-US" sz="1100" dirty="0">
+                <a:solidFill>
+                  <a:srgbClr val="9FADBE"/>
+                </a:solidFill>
+                <a:latin typeface="Verdana" pitchFamily="34" charset="0"/>
+                <a:ea typeface="Verdana" pitchFamily="34" charset="-122"/>
+                <a:cs typeface="Verdana" pitchFamily="34" charset="-120"/>
+              </a:rPr>
+              <a:t>"Qual o valor da mensalidade?" O sistema admite que não sabe.</a:t>
+            </a:r>
+            <a:endParaRPr lang="en-US" sz="1100" dirty="0"/>
+          </a:p>
+        </p:txBody>
+      </p:sp>
+      <p:sp>
+        <p:nvSpPr>
+          <p:cNvPr id="24" name="Text 22"/>
+          <p:cNvSpPr/>
+          <p:nvPr/>
+        </p:nvSpPr>
+        <p:spPr>
+          <a:xfrm>
+            <a:off x="548640" y="6510528"/>
+            <a:ext cx="7315200" cy="256032"/>
+          </a:xfrm>
+          <a:prstGeom prst="rect">
+            <a:avLst/>
+          </a:prstGeom>
+          <a:noFill/>
+          <a:ln/>
+        </p:spPr>
+        <p:txBody>
+          <a:bodyPr wrap="square" rtlCol="0" anchor="ctr"/>
+          <a:lstStyle/>
+          <a:p>
+            <a:pPr indent="0" marL="0">
+              <a:buNone/>
+            </a:pPr>
+            <a:r>
+              <a:rPr lang="en-US" sz="900" dirty="0">
+                <a:solidFill>
+                  <a:srgbClr val="71829A"/>
+                </a:solidFill>
+                <a:latin typeface="Verdana" pitchFamily="34" charset="0"/>
+                <a:ea typeface="Verdana" pitchFamily="34" charset="-122"/>
+                <a:cs typeface="Verdana" pitchFamily="34" charset="-120"/>
+              </a:rPr>
+              <a:t>PermaneIA · Inteligência Artificial · 2026-2</a:t>
+            </a:r>
+            <a:endParaRPr lang="en-US" sz="900" dirty="0"/>
+          </a:p>
+        </p:txBody>
+      </p:sp>
+      <p:sp>
+        <p:nvSpPr>
+          <p:cNvPr id="25" name="Text 23"/>
+          <p:cNvSpPr/>
+          <p:nvPr/>
+        </p:nvSpPr>
+        <p:spPr>
+          <a:xfrm>
+            <a:off x="11185855" y="6510528"/>
+            <a:ext cx="457200" cy="256032"/>
+          </a:xfrm>
+          <a:prstGeom prst="rect">
+            <a:avLst/>
+          </a:prstGeom>
+          <a:noFill/>
+          <a:ln/>
+        </p:spPr>
+        <p:txBody>
+          <a:bodyPr wrap="square" rtlCol="0" anchor="ctr"/>
+          <a:lstStyle/>
+          <a:p>
+            <a:pPr algn="r" indent="0" marL="0">
+              <a:buNone/>
+            </a:pPr>
+            <a:r>
+              <a:rPr lang="en-US" sz="900" dirty="0">
+                <a:solidFill>
+                  <a:srgbClr val="71829A"/>
+                </a:solidFill>
+                <a:latin typeface="Verdana" pitchFamily="34" charset="0"/>
+                <a:ea typeface="Verdana" pitchFamily="34" charset="-122"/>
+                <a:cs typeface="Verdana" pitchFamily="34" charset="-120"/>
+              </a:rPr>
+              <a:t>13</a:t>
+            </a:r>
+            <a:endParaRPr lang="en-US" sz="900" dirty="0"/>
+          </a:p>
+        </p:txBody>
+      </p:sp>
+    </p:spTree>
+  </p:cSld>
+  <p:clrMapOvr>
+    <a:masterClrMapping/>
+  </p:clrMapOvr>
+</p:sld>
+</file>
+
+<file path=ppt/slides/slide14.xml><?xml version="1.0" encoding="utf-8"?>
+<p:sld xmlns:a="http://schemas.openxmlformats.org/drawingml/2006/main" xmlns:r="http://schemas.openxmlformats.org/officeDocument/2006/relationships" xmlns:p="http://schemas.openxmlformats.org/presentationml/2006/main">
+  <p:cSld name="Slide 14">
     <p:bg>
       <p:bgPr>
         <a:solidFill>

--- a/PermaneIA-Apresentacao.pptx
+++ b/PermaneIA-Apresentacao.pptx
@@ -1043,7 +1043,9 @@
           <a:p>
             <a:r>
               <a:rPr lang="en-US" dirty="0"/>
-              <a:t/>
+              <a:t>64,7%: de desistência acumulada na rede privada, no ciclo 2020–2024. Instituto Semesp, Mapa do Ensino Superior 2026. Indicadores de trajetória, base Inep. https://www.semesp.org.br/mapa/edicao-16/brasil/
+68,1%: de desistência acumulada no EAD privado, no ciclo 2020–2024. Instituto Semesp, Mapa do Ensino Superior 2026. Indicadores de trajetória, base Inep. https://www.semesp.org.br/mapa/edicao-16/brasil/
+49%: dos ingressantes em bacharelados no Brasil concluem até três anos após a duração prevista. OCDE, Education at a Glance 2025, nota do Brasil, tabela B5.1. https://www.oecd.org/en/publications/education-at-a-glance-2025_1a3543e2-en/brazil_d42263a0-en.html</a:t>
             </a:r>
             <a:endParaRPr lang="en-US" dirty="0"/>
           </a:p>
@@ -6582,7 +6584,7 @@
                 <a:ea typeface="Verdana" pitchFamily="34" charset="-122"/>
                 <a:cs typeface="Verdana" pitchFamily="34" charset="-120"/>
               </a:rPr>
-              <a:t>Mais da metade não termina o que começou</a:t>
+              <a:t>Permanência exige acompanhamento</a:t>
             </a:r>
             <a:endParaRPr lang="en-US" sz="2800" dirty="0"/>
           </a:p>
@@ -6624,7 +6626,7 @@
                 <a:ea typeface="Verdana" pitchFamily="34" charset="-122"/>
                 <a:cs typeface="Verdana" pitchFamily="34" charset="-120"/>
               </a:rPr>
-              <a:t>A evasão no ensino superior brasileiro não é um risco distante: é o desfecho mais provável para boa parte de quem entra. E o abandono não começa quando a nota cai. Começa quando o aluno para de aparecer.</a:t>
+              <a:t>Os indicadores abaixo usam populações e períodos diferentes. Eles contextualizam o problema; não medem a eficácia do PermaneIA. O alerta fuzzy é uma heurística acadêmica, ainda sem validação preditiva com alunos reais.</a:t>
             </a:r>
             <a:endParaRPr lang="en-US" sz="1500" dirty="0"/>
           </a:p>
@@ -6639,7 +6641,7 @@
         <p:spPr>
           <a:xfrm>
             <a:off x="640080" y="3200400"/>
-            <a:ext cx="2560320" cy="1737360"/>
+            <a:ext cx="3474720" cy="1737360"/>
           </a:xfrm>
           <a:prstGeom prst="roundRect">
             <a:avLst>
@@ -6666,7 +6668,7 @@
         <p:spPr>
           <a:xfrm>
             <a:off x="640080" y="3401568"/>
-            <a:ext cx="2560320" cy="777240"/>
+            <a:ext cx="3474720" cy="777240"/>
           </a:xfrm>
           <a:prstGeom prst="rect">
             <a:avLst/>
@@ -6690,7 +6692,7 @@
                 <a:ea typeface="Verdana" pitchFamily="34" charset="-122"/>
                 <a:cs typeface="Verdana" pitchFamily="34" charset="-120"/>
               </a:rPr>
-              <a:t>57,2%</a:t>
+              <a:t>64,7%</a:t>
             </a:r>
             <a:endParaRPr lang="en-US" sz="3400" dirty="0"/>
           </a:p>
@@ -6705,7 +6707,7 @@
         <p:spPr>
           <a:xfrm>
             <a:off x="777240" y="4187952"/>
-            <a:ext cx="2286000" cy="640080"/>
+            <a:ext cx="3200400" cy="640080"/>
           </a:xfrm>
           <a:prstGeom prst="rect">
             <a:avLst/>
@@ -6729,7 +6731,7 @@
                 <a:ea typeface="Verdana" pitchFamily="34" charset="-122"/>
                 <a:cs typeface="Verdana" pitchFamily="34" charset="-120"/>
               </a:rPr>
-              <a:t>de evasão no ensino superior brasileiro</a:t>
+              <a:t>de desistência acumulada na rede privada, no ciclo 2020–2024</a:t>
             </a:r>
             <a:endParaRPr lang="en-US" sz="1100" dirty="0"/>
           </a:p>
@@ -6743,8 +6745,8 @@
         </p:nvSpPr>
         <p:spPr>
           <a:xfrm>
-            <a:off x="3429000" y="3200400"/>
-            <a:ext cx="2560320" cy="1737360"/>
+            <a:off x="4343400" y="3200400"/>
+            <a:ext cx="3474720" cy="1737360"/>
           </a:xfrm>
           <a:prstGeom prst="roundRect">
             <a:avLst>
@@ -6770,8 +6772,8 @@
         </p:nvSpPr>
         <p:spPr>
           <a:xfrm>
-            <a:off x="3429000" y="3401568"/>
-            <a:ext cx="2560320" cy="777240"/>
+            <a:off x="4343400" y="3401568"/>
+            <a:ext cx="3474720" cy="777240"/>
           </a:xfrm>
           <a:prstGeom prst="rect">
             <a:avLst/>
@@ -6795,7 +6797,7 @@
                 <a:ea typeface="Verdana" pitchFamily="34" charset="-122"/>
                 <a:cs typeface="Verdana" pitchFamily="34" charset="-120"/>
               </a:rPr>
-              <a:t>~61%</a:t>
+              <a:t>68,1%</a:t>
             </a:r>
             <a:endParaRPr lang="en-US" sz="3400" dirty="0"/>
           </a:p>
@@ -6809,8 +6811,8 @@
         </p:nvSpPr>
         <p:spPr>
           <a:xfrm>
-            <a:off x="3566160" y="4187952"/>
-            <a:ext cx="2286000" cy="640080"/>
+            <a:off x="4480560" y="4187952"/>
+            <a:ext cx="3200400" cy="640080"/>
           </a:xfrm>
           <a:prstGeom prst="rect">
             <a:avLst/>
@@ -6834,7 +6836,7 @@
                 <a:ea typeface="Verdana" pitchFamily="34" charset="-122"/>
                 <a:cs typeface="Verdana" pitchFamily="34" charset="-120"/>
               </a:rPr>
-              <a:t>na rede privada, 64% no ensino a distância</a:t>
+              <a:t>de desistência acumulada no EAD privado, no ciclo 2020–2024</a:t>
             </a:r>
             <a:endParaRPr lang="en-US" sz="1100" dirty="0"/>
           </a:p>
@@ -6848,8 +6850,8 @@
         </p:nvSpPr>
         <p:spPr>
           <a:xfrm>
-            <a:off x="6217920" y="3200400"/>
-            <a:ext cx="2560320" cy="1737360"/>
+            <a:off x="8046720" y="3200400"/>
+            <a:ext cx="3474720" cy="1737360"/>
           </a:xfrm>
           <a:prstGeom prst="roundRect">
             <a:avLst>
@@ -6875,8 +6877,8 @@
         </p:nvSpPr>
         <p:spPr>
           <a:xfrm>
-            <a:off x="6217920" y="3401568"/>
-            <a:ext cx="2560320" cy="777240"/>
+            <a:off x="8046720" y="3401568"/>
+            <a:ext cx="3474720" cy="777240"/>
           </a:xfrm>
           <a:prstGeom prst="rect">
             <a:avLst/>
@@ -6894,13 +6896,13 @@
             <a:r>
               <a:rPr lang="en-US" sz="3400" b="1" dirty="0">
                 <a:solidFill>
-                  <a:srgbClr val="D9A015"/>
-                </a:solidFill>
-                <a:latin typeface="Verdana" pitchFamily="34" charset="0"/>
-                <a:ea typeface="Verdana" pitchFamily="34" charset="-122"/>
-                <a:cs typeface="Verdana" pitchFamily="34" charset="-120"/>
-              </a:rPr>
-              <a:t>1 em 4</a:t>
+                  <a:srgbClr val="45BD8A"/>
+                </a:solidFill>
+                <a:latin typeface="Verdana" pitchFamily="34" charset="0"/>
+                <a:ea typeface="Verdana" pitchFamily="34" charset="-122"/>
+                <a:cs typeface="Verdana" pitchFamily="34" charset="-120"/>
+              </a:rPr>
+              <a:t>49%</a:t>
             </a:r>
             <a:endParaRPr lang="en-US" sz="3400" dirty="0"/>
           </a:p>
@@ -6914,8 +6916,8 @@
         </p:nvSpPr>
         <p:spPr>
           <a:xfrm>
-            <a:off x="6355080" y="4187952"/>
-            <a:ext cx="2286000" cy="640080"/>
+            <a:off x="8183880" y="4187952"/>
+            <a:ext cx="3200400" cy="640080"/>
           </a:xfrm>
           <a:prstGeom prst="rect">
             <a:avLst/>
@@ -6939,7 +6941,7 @@
                 <a:ea typeface="Verdana" pitchFamily="34" charset="-122"/>
                 <a:cs typeface="Verdana" pitchFamily="34" charset="-120"/>
               </a:rPr>
-              <a:t>jovens conclui a graduação que iniciou</a:t>
+              <a:t>dos ingressantes em bacharelados no Brasil concluem até três anos após a duração prevista</a:t>
             </a:r>
             <a:endParaRPr lang="en-US" sz="1100" dirty="0"/>
           </a:p>
@@ -6947,119 +6949,14 @@
       </p:sp>
       <p:sp>
         <p:nvSpPr>
-          <p:cNvPr id="14" name="Shape 12"/>
-          <p:cNvSpPr/>
-          <p:nvPr/>
-        </p:nvSpPr>
-        <p:spPr>
-          <a:xfrm>
-            <a:off x="9006840" y="3200400"/>
-            <a:ext cx="2560320" cy="1737360"/>
-          </a:xfrm>
-          <a:prstGeom prst="roundRect">
-            <a:avLst>
-              <a:gd name="adj" fmla="val 4211"/>
-            </a:avLst>
-          </a:prstGeom>
-          <a:solidFill>
-            <a:srgbClr val="141B26"/>
-          </a:solidFill>
-          <a:ln w="12700">
-            <a:solidFill>
-              <a:srgbClr val="2B3849"/>
-            </a:solidFill>
-            <a:prstDash val="solid"/>
-          </a:ln>
-        </p:spPr>
-      </p:sp>
-      <p:sp>
-        <p:nvSpPr>
-          <p:cNvPr id="15" name="Text 13"/>
-          <p:cNvSpPr/>
-          <p:nvPr/>
-        </p:nvSpPr>
-        <p:spPr>
-          <a:xfrm>
-            <a:off x="9006840" y="3401568"/>
-            <a:ext cx="2560320" cy="777240"/>
-          </a:xfrm>
-          <a:prstGeom prst="rect">
-            <a:avLst/>
-          </a:prstGeom>
-          <a:noFill/>
-          <a:ln/>
-        </p:spPr>
-        <p:txBody>
-          <a:bodyPr wrap="square" rtlCol="0" anchor="ctr"/>
-          <a:lstStyle/>
-          <a:p>
-            <a:pPr algn="ctr" indent="0" marL="0">
-              <a:buNone/>
-            </a:pPr>
-            <a:r>
-              <a:rPr lang="en-US" sz="3400" b="1" dirty="0">
-                <a:solidFill>
-                  <a:srgbClr val="45BD8A"/>
-                </a:solidFill>
-                <a:latin typeface="Verdana" pitchFamily="34" charset="0"/>
-                <a:ea typeface="Verdana" pitchFamily="34" charset="-122"/>
-                <a:cs typeface="Verdana" pitchFamily="34" charset="-120"/>
-              </a:rPr>
-              <a:t>semanas</a:t>
-            </a:r>
-            <a:endParaRPr lang="en-US" sz="3400" dirty="0"/>
-          </a:p>
-        </p:txBody>
-      </p:sp>
-      <p:sp>
-        <p:nvSpPr>
-          <p:cNvPr id="16" name="Text 14"/>
-          <p:cNvSpPr/>
-          <p:nvPr/>
-        </p:nvSpPr>
-        <p:spPr>
-          <a:xfrm>
-            <a:off x="9144000" y="4187952"/>
-            <a:ext cx="2286000" cy="640080"/>
-          </a:xfrm>
-          <a:prstGeom prst="rect">
-            <a:avLst/>
-          </a:prstGeom>
-          <a:noFill/>
-          <a:ln/>
-        </p:spPr>
-        <p:txBody>
-          <a:bodyPr wrap="square" rtlCol="0" anchor="ctr"/>
-          <a:lstStyle/>
-          <a:p>
-            <a:pPr algn="ctr" indent="0" marL="0">
-              <a:buNone/>
-            </a:pPr>
-            <a:r>
-              <a:rPr lang="en-US" sz="1100" dirty="0">
-                <a:solidFill>
-                  <a:srgbClr val="9FADBE"/>
-                </a:solidFill>
-                <a:latin typeface="Verdana" pitchFamily="34" charset="0"/>
-                <a:ea typeface="Verdana" pitchFamily="34" charset="-122"/>
-                <a:cs typeface="Verdana" pitchFamily="34" charset="-120"/>
-              </a:rPr>
-              <a:t>de antecedência entre sumir e a nota cair</a:t>
-            </a:r>
-            <a:endParaRPr lang="en-US" sz="1100" dirty="0"/>
-          </a:p>
-        </p:txBody>
-      </p:sp>
-      <p:sp>
-        <p:nvSpPr>
-          <p:cNvPr id="17" name="Text 15"/>
+          <p:cNvPr id="14" name="Text 12"/>
           <p:cNvSpPr/>
           <p:nvPr/>
         </p:nvSpPr>
         <p:spPr>
           <a:xfrm>
             <a:off x="640080" y="5257800"/>
-            <a:ext cx="10972800" cy="365760"/>
+            <a:ext cx="10972800" cy="594360"/>
           </a:xfrm>
           <a:prstGeom prst="rect">
             <a:avLst/>
@@ -7083,7 +6980,7 @@
                 <a:ea typeface="Verdana" pitchFamily="34" charset="-122"/>
                 <a:cs typeface="Verdana" pitchFamily="34" charset="-120"/>
               </a:rPr>
-              <a:t>Fontes: Mapa do Ensino Superior 2024 e 2026, Instituto Semesp; OCDE, Education at a Glance 2025.</a:t>
+              <a:t>Fontes: Semesp, Mapa do Ensino Superior 2026 (trajetória 2020–2024); OCDE, Education at a Glance 2025, Brasil, tabela B5.1.</a:t>
             </a:r>
             <a:endParaRPr lang="en-US" sz="1000" dirty="0"/>
           </a:p>
@@ -7091,7 +6988,7 @@
       </p:sp>
       <p:sp>
         <p:nvSpPr>
-          <p:cNvPr id="18" name="Text 16"/>
+          <p:cNvPr id="16" name="Text 13"/>
           <p:cNvSpPr/>
           <p:nvPr/>
         </p:nvSpPr>
@@ -7130,7 +7027,7 @@
       </p:sp>
       <p:sp>
         <p:nvSpPr>
-          <p:cNvPr id="19" name="Text 17"/>
+          <p:cNvPr id="17" name="Text 14"/>
           <p:cNvSpPr/>
           <p:nvPr/>
         </p:nvSpPr>
@@ -7772,7 +7669,7 @@
                 <a:ea typeface="Verdana" pitchFamily="34" charset="-122"/>
                 <a:cs typeface="Verdana" pitchFamily="34" charset="-120"/>
               </a:rPr>
-              <a:t>O CASO QUE JUSTIFICA O PROJETO</a:t>
+              <a:t>EXEMPLO SINTÉTICO</a:t>
             </a:r>
             <a:endParaRPr lang="en-US" sz="1100" dirty="0"/>
           </a:p>
@@ -7811,7 +7708,7 @@
                 <a:ea typeface="Verdana" pitchFamily="34" charset="-122"/>
                 <a:cs typeface="Verdana" pitchFamily="34" charset="-120"/>
               </a:rPr>
-              <a:t>O aluno que o critério da secretaria não enxerga</a:t>
+              <a:t>Um alerta além da média de notas</a:t>
             </a:r>
             <a:endParaRPr lang="en-US" sz="2800" dirty="0"/>
           </a:p>
@@ -9527,7 +9424,7 @@
                 <a:ea typeface="Verdana" pitchFamily="34" charset="-122"/>
                 <a:cs typeface="Verdana" pitchFamily="34" charset="-120"/>
               </a:rPr>
-              <a:t>A linha do meio é o projeto inteiro. Um critério baseado na média de notas classifica esse aluno como tranquilo. O sistema fuzzy o coloca em risco alto, e a regra 8 explica por quê: bom desempenho não anula a ausência sistemática das aulas, o histórico apenas atrasa o efeito na média.</a:t>
+              <a:t>A referência simplificada por nota não sinaliza o caso da linha do meio. A regra fuzzy combina baixa frequência e poucos acessos, mesmo com nota alta. O exemplo mostra a diferença entre os critérios; não prova que algum deles prevê evasão real.</a:t>
             </a:r>
             <a:endParaRPr lang="en-US" sz="1400" dirty="0"/>
           </a:p>
@@ -12381,7 +12278,7 @@
                 <a:ea typeface="Verdana" pitchFamily="34" charset="-122"/>
                 <a:cs typeface="Verdana" pitchFamily="34" charset="-120"/>
               </a:rPr>
-              <a:t>VISÃO CRÍTICA</a:t>
+              <a:t>RESULTADOS HISTÓRICOS DA BATERIA</a:t>
             </a:r>
             <a:endParaRPr lang="en-US" sz="1100" dirty="0"/>
           </a:p>
@@ -12420,7 +12317,7 @@
                 <a:ea typeface="Verdana" pitchFamily="34" charset="-122"/>
                 <a:cs typeface="Verdana" pitchFamily="34" charset="-120"/>
               </a:rPr>
-              <a:t>O que medimos, e o que não conseguimos resolver</a:t>
+              <a:t>Métricas com escopo limitado</a:t>
             </a:r>
             <a:endParaRPr lang="en-US" sz="2800" dirty="0"/>
           </a:p>
@@ -12948,7 +12845,7 @@
                 <a:ea typeface="Verdana" pitchFamily="34" charset="-122"/>
                 <a:cs typeface="Verdana" pitchFamily="34" charset="-120"/>
               </a:rPr>
-              <a:t>O maior risco deste sistema não é inventar uma data. É repetir com confiança a data certa de uma ementa do semestre passado. O RAG resolve alucinação, não desatualização.</a:t>
+              <a:t>Esses resultados correspondem às configurações registradas em AVALIACAO-RAG.md e não garantem o desempenho de novas versões. O RAG pode gerar respostas incorretas ou usar documentos desatualizados.</a:t>
             </a:r>
             <a:endParaRPr lang="en-US" sz="1250" dirty="0"/>
           </a:p>
@@ -12977,7 +12874,7 @@
                 <a:ea typeface="Verdana" pitchFamily="34" charset="-122"/>
                 <a:cs typeface="Verdana" pitchFamily="34" charset="-120"/>
               </a:rPr>
-              <a:t>A mitigação é parcial: todo documento carrega uma referência de data que aparece em toda citação. Uma solução real exigiria integração com o sistema acadêmico.</a:t>
+              <a:t>A referência de data ajuda a revisão, mas não prova atualidade nem fidelidade de toda a resposta. O score fuzzy ainda exige avaliação com dados reais.</a:t>
             </a:r>
             <a:endParaRPr lang="en-US" sz="1250" dirty="0"/>
           </a:p>
